--- a/Qlik-Observability-Toolkit-Architecture.pptx
+++ b/Qlik-Observability-Toolkit-Architecture.pptx
@@ -1476,7 +1476,7 @@
                 <a:ea typeface="Inter" pitchFamily="34" charset="-122"/>
                 <a:cs typeface="Inter" pitchFamily="34" charset="-120"/>
               </a:rPr>
-              <a:t>315</a:t>
+              <a:t>9</a:t>
             </a:r>
             <a:endParaRPr lang="en-US" sz="3000" dirty="0"/>
           </a:p>
@@ -1515,7 +1515,7 @@
                 <a:ea typeface="Inter" pitchFamily="34" charset="-122"/>
                 <a:cs typeface="Inter" pitchFamily="34" charset="-120"/>
               </a:rPr>
-              <a:t>MCP tools</a:t>
+              <a:t>observability tools</a:t>
             </a:r>
             <a:endParaRPr lang="en-US" sz="1300" dirty="0"/>
           </a:p>
@@ -1554,7 +1554,7 @@
                 <a:ea typeface="Inter" pitchFamily="34" charset="-122"/>
                 <a:cs typeface="Inter" pitchFamily="34" charset="-120"/>
               </a:rPr>
-              <a:t>Auto-generated from all 20 Talend Cloud OpenAPI specs.</a:t>
+              <a:t>Read-only Talend observability surface (+ tenant-discovery meta-tool), auto-generated from OpenAPI specs.</a:t>
             </a:r>
             <a:endParaRPr lang="en-US" sz="1100" dirty="0"/>
           </a:p>
@@ -5681,7 +5681,7 @@
                 <a:ea typeface="Inter" pitchFamily="34" charset="-122"/>
                 <a:cs typeface="Inter" pitchFamily="34" charset="-120"/>
               </a:rPr>
-              <a:t>~9 tools</a:t>
+              <a:t>9 tools</a:t>
             </a:r>
             <a:endParaRPr lang="en-US" sz="1100" dirty="0"/>
           </a:p>
@@ -5720,7 +5720,7 @@
                 <a:ea typeface="Inter" pitchFamily="34" charset="-122"/>
                 <a:cs typeface="Inter" pitchFamily="34" charset="-120"/>
               </a:rPr>
-              <a:t>Pure read-only: observability-metrics, execution-logs, execution-history-search. Drops audit.</a:t>
+              <a:t>Default. Pure read-only: observability-metrics, execution-logs, execution-history-search, plus the tenant-discovery meta-tool. Drops audit.</a:t>
             </a:r>
             <a:endParaRPr lang="en-US" sz="1000" dirty="0"/>
           </a:p>
@@ -5759,7 +5759,7 @@
                 <a:ea typeface="Inter" pitchFamily="34" charset="-122"/>
                 <a:cs typeface="Inter" pitchFamily="34" charset="-120"/>
               </a:rPr>
-              <a:t>RECOMMENDED IN OBSERVABILITY MODE</a:t>
+              <a:t>DEFAULT — LOADED OUT OF THE BOX</a:t>
             </a:r>
             <a:endParaRPr lang="en-US" sz="800" dirty="0"/>
           </a:p>
@@ -5864,7 +5864,7 @@
                 <a:ea typeface="Inter" pitchFamily="34" charset="-122"/>
                 <a:cs typeface="Inter" pitchFamily="34" charset="-120"/>
               </a:rPr>
-              <a:t>~10 tools</a:t>
+              <a:t>10 tools</a:t>
             </a:r>
             <a:endParaRPr lang="en-US" sz="1100" dirty="0"/>
           </a:p>
@@ -5918,7 +5918,7 @@
         <p:spPr>
           <a:xfrm>
             <a:off x="6126480" y="1371600"/>
-            <a:ext cx="2697480" cy="2103120"/>
+            <a:ext cx="5605272" cy="2103120"/>
           </a:xfrm>
           <a:prstGeom prst="roundRect">
             <a:avLst>
@@ -5945,7 +5945,7 @@
         <p:spPr>
           <a:xfrm>
             <a:off x="6263640" y="1508760"/>
-            <a:ext cx="2377440" cy="320040"/>
+            <a:ext cx="5303520" cy="320040"/>
           </a:xfrm>
           <a:prstGeom prst="rect">
             <a:avLst/>
@@ -5969,7 +5969,7 @@
                 <a:ea typeface="Inter" pitchFamily="34" charset="-122"/>
                 <a:cs typeface="Inter" pitchFamily="34" charset="-120"/>
               </a:rPr>
-              <a:t>orchestrate</a:t>
+              <a:t>Observability-only by design</a:t>
             </a:r>
             <a:endParaRPr lang="en-US" sz="1400" dirty="0"/>
           </a:p>
@@ -5984,7 +5984,46 @@
         <p:spPr>
           <a:xfrm>
             <a:off x="6263640" y="1874520"/>
-            <a:ext cx="2377440" cy="274320"/>
+            <a:ext cx="5303520" cy="1463040"/>
+          </a:xfrm>
+          <a:prstGeom prst="rect">
+            <a:avLst/>
+          </a:prstGeom>
+          <a:noFill/>
+          <a:ln/>
+        </p:spPr>
+        <p:txBody>
+          <a:bodyPr wrap="square" rtlCol="0" anchor="ctr"/>
+          <a:lstStyle/>
+          <a:p>
+            <a:pPr indent="0" marL="0">
+              <a:buNone/>
+            </a:pPr>
+            <a:r>
+              <a:rPr lang="en-US" sz="1000" dirty="0">
+                <a:solidFill>
+                  <a:srgbClr val="A9B3B6"/>
+                </a:solidFill>
+                <a:latin typeface="Inter" pitchFamily="34" charset="0"/>
+                <a:ea typeface="Inter" pitchFamily="34" charset="-122"/>
+                <a:cs typeface="Inter" pitchFamily="34" charset="-120"/>
+              </a:rPr>
+              <a:t>No orchestration or admin endpoints are exposed. The MCP server defaults to the observability preset; only the observability and logging presets ship. Need a wider surface? Pass an explicit TMC_APIS=&lt;comma,list&gt; — but the product is scoped to read-only observability.</a:t>
+            </a:r>
+            <a:endParaRPr lang="en-US" sz="1000" dirty="0"/>
+          </a:p>
+        </p:txBody>
+      </p:sp>
+      <p:sp>
+        <p:nvSpPr>
+          <p:cNvPr id="16" name="Text 14"/>
+          <p:cNvSpPr/>
+          <p:nvPr/>
+        </p:nvSpPr>
+        <p:spPr>
+          <a:xfrm>
+            <a:off x="457200" y="3749040"/>
+            <a:ext cx="7315200" cy="274320"/>
           </a:xfrm>
           <a:prstGeom prst="rect">
             <a:avLst/>
@@ -6002,13 +6041,13 @@
             <a:r>
               <a:rPr lang="en-US" sz="1100" b="1" dirty="0">
                 <a:solidFill>
-                  <a:srgbClr val="009845"/>
-                </a:solidFill>
-                <a:latin typeface="Inter" pitchFamily="34" charset="0"/>
-                <a:ea typeface="Inter" pitchFamily="34" charset="-122"/>
-                <a:cs typeface="Inter" pitchFamily="34" charset="-120"/>
-              </a:rPr>
-              <a:t>~100 tools</a:t>
+                  <a:srgbClr val="A9B3B6"/>
+                </a:solidFill>
+                <a:latin typeface="Inter" pitchFamily="34" charset="0"/>
+                <a:ea typeface="Inter" pitchFamily="34" charset="-122"/>
+                <a:cs typeface="Inter" pitchFamily="34" charset="-120"/>
+              </a:rPr>
+              <a:t>CONFIGURATION UI (npm run config-ui)</a:t>
             </a:r>
             <a:endParaRPr lang="en-US" sz="1100" dirty="0"/>
           </a:p>
@@ -6016,57 +6055,18 @@
       </p:sp>
       <p:sp>
         <p:nvSpPr>
-          <p:cNvPr id="16" name="Text 14"/>
-          <p:cNvSpPr/>
-          <p:nvPr/>
-        </p:nvSpPr>
-        <p:spPr>
-          <a:xfrm>
-            <a:off x="6263640" y="2148840"/>
-            <a:ext cx="2423160" cy="1234440"/>
-          </a:xfrm>
-          <a:prstGeom prst="rect">
-            <a:avLst/>
-          </a:prstGeom>
-          <a:noFill/>
-          <a:ln/>
-        </p:spPr>
-        <p:txBody>
-          <a:bodyPr wrap="square" rtlCol="0" anchor="ctr"/>
-          <a:lstStyle/>
-          <a:p>
-            <a:pPr indent="0" marL="0">
-              <a:buNone/>
-            </a:pPr>
-            <a:r>
-              <a:rPr lang="en-US" sz="1000" dirty="0">
-                <a:solidFill>
-                  <a:srgbClr val="A9B3B6"/>
-                </a:solidFill>
-                <a:latin typeface="Inter" pitchFamily="34" charset="0"/>
-                <a:ea typeface="Inter" pitchFamily="34" charset="-122"/>
-                <a:cs typeface="Inter" pitchFamily="34" charset="-120"/>
-              </a:rPr>
-              <a:t>Run things: orchestration tools + the observability trio.</a:t>
-            </a:r>
-            <a:endParaRPr lang="en-US" sz="1000" dirty="0"/>
-          </a:p>
-        </p:txBody>
-      </p:sp>
-      <p:sp>
-        <p:nvSpPr>
           <p:cNvPr id="17" name="Shape 15"/>
           <p:cNvSpPr/>
           <p:nvPr/>
         </p:nvSpPr>
         <p:spPr>
           <a:xfrm>
-            <a:off x="8961120" y="1371600"/>
-            <a:ext cx="2697480" cy="2103120"/>
+            <a:off x="457200" y="4114800"/>
+            <a:ext cx="2697480" cy="2377440"/>
           </a:xfrm>
           <a:prstGeom prst="roundRect">
             <a:avLst>
-              <a:gd name="adj" fmla="val 2609"/>
+              <a:gd name="adj" fmla="val 2308"/>
             </a:avLst>
           </a:prstGeom>
           <a:solidFill>
@@ -6082,30 +6082,89 @@
       </p:sp>
       <p:sp>
         <p:nvSpPr>
-          <p:cNvPr id="18" name="Text 16"/>
-          <p:cNvSpPr/>
-          <p:nvPr/>
-        </p:nvSpPr>
-        <p:spPr>
-          <a:xfrm>
-            <a:off x="9098280" y="1508760"/>
-            <a:ext cx="2377440" cy="320040"/>
-          </a:xfrm>
-          <a:prstGeom prst="rect">
-            <a:avLst/>
-          </a:prstGeom>
-          <a:noFill/>
-          <a:ln/>
-        </p:spPr>
-        <p:txBody>
-          <a:bodyPr wrap="square" rtlCol="0" anchor="ctr"/>
-          <a:lstStyle/>
-          <a:p>
-            <a:pPr indent="0" marL="0">
-              <a:buNone/>
-            </a:pPr>
-            <a:r>
-              <a:rPr lang="en-US" sz="1400" b="1" dirty="0">
+          <p:cNvPr id="18" name="Shape 16"/>
+          <p:cNvSpPr/>
+          <p:nvPr/>
+        </p:nvSpPr>
+        <p:spPr>
+          <a:xfrm>
+            <a:off x="457200" y="4114800"/>
+            <a:ext cx="2697480" cy="365760"/>
+          </a:xfrm>
+          <a:prstGeom prst="rect">
+            <a:avLst/>
+          </a:prstGeom>
+          <a:solidFill>
+            <a:srgbClr val="93579C"/>
+          </a:solidFill>
+          <a:ln/>
+        </p:spPr>
+      </p:sp>
+      <p:sp>
+        <p:nvSpPr>
+          <p:cNvPr id="19" name="Text 17"/>
+          <p:cNvSpPr/>
+          <p:nvPr/>
+        </p:nvSpPr>
+        <p:spPr>
+          <a:xfrm>
+            <a:off x="594360" y="4169664"/>
+            <a:ext cx="2377440" cy="274320"/>
+          </a:xfrm>
+          <a:prstGeom prst="rect">
+            <a:avLst/>
+          </a:prstGeom>
+          <a:noFill/>
+          <a:ln/>
+        </p:spPr>
+        <p:txBody>
+          <a:bodyPr wrap="square" rtlCol="0" anchor="ctr"/>
+          <a:lstStyle/>
+          <a:p>
+            <a:pPr indent="0" marL="0">
+              <a:buNone/>
+            </a:pPr>
+            <a:r>
+              <a:rPr lang="en-US" sz="1200" b="1" dirty="0">
+                <a:solidFill>
+                  <a:srgbClr val="FFFFFF"/>
+                </a:solidFill>
+                <a:latin typeface="Inter" pitchFamily="34" charset="0"/>
+                <a:ea typeface="Inter" pitchFamily="34" charset="-122"/>
+                <a:cs typeface="Inter" pitchFamily="34" charset="-120"/>
+              </a:rPr>
+              <a:t>Talend Cloud</a:t>
+            </a:r>
+            <a:endParaRPr lang="en-US" sz="1200" dirty="0"/>
+          </a:p>
+        </p:txBody>
+      </p:sp>
+      <p:sp>
+        <p:nvSpPr>
+          <p:cNvPr id="20" name="Text 18"/>
+          <p:cNvSpPr/>
+          <p:nvPr/>
+        </p:nvSpPr>
+        <p:spPr>
+          <a:xfrm>
+            <a:off x="594360" y="4617720"/>
+            <a:ext cx="2423160" cy="1828800"/>
+          </a:xfrm>
+          <a:prstGeom prst="rect">
+            <a:avLst/>
+          </a:prstGeom>
+          <a:noFill/>
+          <a:ln/>
+        </p:spPr>
+        <p:txBody>
+          <a:bodyPr wrap="square" rtlCol="0" anchor="ctr"/>
+          <a:lstStyle/>
+          <a:p>
+            <a:pPr indent="0" marL="0">
+              <a:buNone/>
+            </a:pPr>
+            <a:r>
+              <a:rPr lang="en-US" sz="1000" dirty="0">
                 <a:solidFill>
                   <a:srgbClr val="2D3543"/>
                 </a:solidFill>
@@ -6113,85 +6172,7 @@
                 <a:ea typeface="Inter" pitchFamily="34" charset="-122"/>
                 <a:cs typeface="Inter" pitchFamily="34" charset="-120"/>
               </a:rPr>
-              <a:t>all</a:t>
-            </a:r>
-            <a:endParaRPr lang="en-US" sz="1400" dirty="0"/>
-          </a:p>
-        </p:txBody>
-      </p:sp>
-      <p:sp>
-        <p:nvSpPr>
-          <p:cNvPr id="19" name="Text 17"/>
-          <p:cNvSpPr/>
-          <p:nvPr/>
-        </p:nvSpPr>
-        <p:spPr>
-          <a:xfrm>
-            <a:off x="9098280" y="1874520"/>
-            <a:ext cx="2377440" cy="274320"/>
-          </a:xfrm>
-          <a:prstGeom prst="rect">
-            <a:avLst/>
-          </a:prstGeom>
-          <a:noFill/>
-          <a:ln/>
-        </p:spPr>
-        <p:txBody>
-          <a:bodyPr wrap="square" rtlCol="0" anchor="ctr"/>
-          <a:lstStyle/>
-          <a:p>
-            <a:pPr indent="0" marL="0">
-              <a:buNone/>
-            </a:pPr>
-            <a:r>
-              <a:rPr lang="en-US" sz="1100" b="1" dirty="0">
-                <a:solidFill>
-                  <a:srgbClr val="009845"/>
-                </a:solidFill>
-                <a:latin typeface="Inter" pitchFamily="34" charset="0"/>
-                <a:ea typeface="Inter" pitchFamily="34" charset="-122"/>
-                <a:cs typeface="Inter" pitchFamily="34" charset="-120"/>
-              </a:rPr>
-              <a:t>315 tools</a:t>
-            </a:r>
-            <a:endParaRPr lang="en-US" sz="1100" dirty="0"/>
-          </a:p>
-        </p:txBody>
-      </p:sp>
-      <p:sp>
-        <p:nvSpPr>
-          <p:cNvPr id="20" name="Text 18"/>
-          <p:cNvSpPr/>
-          <p:nvPr/>
-        </p:nvSpPr>
-        <p:spPr>
-          <a:xfrm>
-            <a:off x="9098280" y="2148840"/>
-            <a:ext cx="2423160" cy="1234440"/>
-          </a:xfrm>
-          <a:prstGeom prst="rect">
-            <a:avLst/>
-          </a:prstGeom>
-          <a:noFill/>
-          <a:ln/>
-        </p:spPr>
-        <p:txBody>
-          <a:bodyPr wrap="square" rtlCol="0" anchor="ctr"/>
-          <a:lstStyle/>
-          <a:p>
-            <a:pPr indent="0" marL="0">
-              <a:buNone/>
-            </a:pPr>
-            <a:r>
-              <a:rPr lang="en-US" sz="1000" dirty="0">
-                <a:solidFill>
-                  <a:srgbClr val="A9B3B6"/>
-                </a:solidFill>
-                <a:latin typeface="Inter" pitchFamily="34" charset="0"/>
-                <a:ea typeface="Inter" pitchFamily="34" charset="-122"/>
-                <a:cs typeface="Inter" pitchFamily="34" charset="-120"/>
-              </a:rPr>
-              <a:t>Every endpoint across all 20 TMC API products.</a:t>
+              <a:t>Add / edit / delete tenants. Per-tenant region + URL override. Test connection. File or OS-keyring storage.</a:t>
             </a:r>
             <a:endParaRPr lang="en-US" sz="1000" dirty="0"/>
           </a:p>
@@ -6199,52 +6180,13 @@
       </p:sp>
       <p:sp>
         <p:nvSpPr>
-          <p:cNvPr id="21" name="Text 19"/>
-          <p:cNvSpPr/>
-          <p:nvPr/>
-        </p:nvSpPr>
-        <p:spPr>
-          <a:xfrm>
-            <a:off x="457200" y="3749040"/>
-            <a:ext cx="7315200" cy="274320"/>
-          </a:xfrm>
-          <a:prstGeom prst="rect">
-            <a:avLst/>
-          </a:prstGeom>
-          <a:noFill/>
-          <a:ln/>
-        </p:spPr>
-        <p:txBody>
-          <a:bodyPr wrap="square" rtlCol="0" anchor="ctr"/>
-          <a:lstStyle/>
-          <a:p>
-            <a:pPr indent="0" marL="0">
-              <a:buNone/>
-            </a:pPr>
-            <a:r>
-              <a:rPr lang="en-US" sz="1100" b="1" dirty="0">
-                <a:solidFill>
-                  <a:srgbClr val="A9B3B6"/>
-                </a:solidFill>
-                <a:latin typeface="Inter" pitchFamily="34" charset="0"/>
-                <a:ea typeface="Inter" pitchFamily="34" charset="-122"/>
-                <a:cs typeface="Inter" pitchFamily="34" charset="-120"/>
-              </a:rPr>
-              <a:t>CONFIGURATION UI (npm run config-ui)</a:t>
-            </a:r>
-            <a:endParaRPr lang="en-US" sz="1100" dirty="0"/>
-          </a:p>
-        </p:txBody>
-      </p:sp>
-      <p:sp>
-        <p:nvSpPr>
-          <p:cNvPr id="22" name="Shape 20"/>
-          <p:cNvSpPr/>
-          <p:nvPr/>
-        </p:nvSpPr>
-        <p:spPr>
-          <a:xfrm>
-            <a:off x="457200" y="4114800"/>
+          <p:cNvPr id="21" name="Shape 19"/>
+          <p:cNvSpPr/>
+          <p:nvPr/>
+        </p:nvSpPr>
+        <p:spPr>
+          <a:xfrm>
+            <a:off x="3291840" y="4114800"/>
             <a:ext cx="2697480" cy="2377440"/>
           </a:xfrm>
           <a:prstGeom prst="roundRect">
@@ -6265,72 +6207,72 @@
       </p:sp>
       <p:sp>
         <p:nvSpPr>
-          <p:cNvPr id="23" name="Shape 21"/>
-          <p:cNvSpPr/>
-          <p:nvPr/>
-        </p:nvSpPr>
-        <p:spPr>
-          <a:xfrm>
-            <a:off x="457200" y="4114800"/>
+          <p:cNvPr id="22" name="Shape 20"/>
+          <p:cNvSpPr/>
+          <p:nvPr/>
+        </p:nvSpPr>
+        <p:spPr>
+          <a:xfrm>
+            <a:off x="3291840" y="4114800"/>
             <a:ext cx="2697480" cy="365760"/>
           </a:xfrm>
           <a:prstGeom prst="rect">
             <a:avLst/>
           </a:prstGeom>
           <a:solidFill>
-            <a:srgbClr val="93579C"/>
+            <a:srgbClr val="009845"/>
           </a:solidFill>
           <a:ln/>
         </p:spPr>
       </p:sp>
       <p:sp>
         <p:nvSpPr>
+          <p:cNvPr id="23" name="Text 21"/>
+          <p:cNvSpPr/>
+          <p:nvPr/>
+        </p:nvSpPr>
+        <p:spPr>
+          <a:xfrm>
+            <a:off x="3429000" y="4169664"/>
+            <a:ext cx="2377440" cy="274320"/>
+          </a:xfrm>
+          <a:prstGeom prst="rect">
+            <a:avLst/>
+          </a:prstGeom>
+          <a:noFill/>
+          <a:ln/>
+        </p:spPr>
+        <p:txBody>
+          <a:bodyPr wrap="square" rtlCol="0" anchor="ctr"/>
+          <a:lstStyle/>
+          <a:p>
+            <a:pPr indent="0" marL="0">
+              <a:buNone/>
+            </a:pPr>
+            <a:r>
+              <a:rPr lang="en-US" sz="1200" b="1" dirty="0">
+                <a:solidFill>
+                  <a:srgbClr val="FFFFFF"/>
+                </a:solidFill>
+                <a:latin typeface="Inter" pitchFamily="34" charset="0"/>
+                <a:ea typeface="Inter" pitchFamily="34" charset="-122"/>
+                <a:cs typeface="Inter" pitchFamily="34" charset="-120"/>
+              </a:rPr>
+              <a:t>Qlik Cloud</a:t>
+            </a:r>
+            <a:endParaRPr lang="en-US" sz="1200" dirty="0"/>
+          </a:p>
+        </p:txBody>
+      </p:sp>
+      <p:sp>
+        <p:nvSpPr>
           <p:cNvPr id="24" name="Text 22"/>
           <p:cNvSpPr/>
           <p:nvPr/>
         </p:nvSpPr>
         <p:spPr>
           <a:xfrm>
-            <a:off x="594360" y="4169664"/>
-            <a:ext cx="2377440" cy="274320"/>
-          </a:xfrm>
-          <a:prstGeom prst="rect">
-            <a:avLst/>
-          </a:prstGeom>
-          <a:noFill/>
-          <a:ln/>
-        </p:spPr>
-        <p:txBody>
-          <a:bodyPr wrap="square" rtlCol="0" anchor="ctr"/>
-          <a:lstStyle/>
-          <a:p>
-            <a:pPr indent="0" marL="0">
-              <a:buNone/>
-            </a:pPr>
-            <a:r>
-              <a:rPr lang="en-US" sz="1200" b="1" dirty="0">
-                <a:solidFill>
-                  <a:srgbClr val="FFFFFF"/>
-                </a:solidFill>
-                <a:latin typeface="Inter" pitchFamily="34" charset="0"/>
-                <a:ea typeface="Inter" pitchFamily="34" charset="-122"/>
-                <a:cs typeface="Inter" pitchFamily="34" charset="-120"/>
-              </a:rPr>
-              <a:t>Talend Cloud</a:t>
-            </a:r>
-            <a:endParaRPr lang="en-US" sz="1200" dirty="0"/>
-          </a:p>
-        </p:txBody>
-      </p:sp>
-      <p:sp>
-        <p:nvSpPr>
-          <p:cNvPr id="25" name="Text 23"/>
-          <p:cNvSpPr/>
-          <p:nvPr/>
-        </p:nvSpPr>
-        <p:spPr>
-          <a:xfrm>
-            <a:off x="594360" y="4617720"/>
+            <a:off x="3429000" y="4617720"/>
             <a:ext cx="2423160" cy="1828800"/>
           </a:xfrm>
           <a:prstGeom prst="rect">
@@ -6355,7 +6297,7 @@
                 <a:ea typeface="Inter" pitchFamily="34" charset="-122"/>
                 <a:cs typeface="Inter" pitchFamily="34" charset="-120"/>
               </a:rPr>
-              <a:t>Add / edit / delete tenants. Per-tenant region + URL override. Test connection. File or OS-keyring storage.</a:t>
+              <a:t>Add / edit / delete tenants. Tenant URL + API key + Data Files connection ID. Test against /api/v1/users/me.</a:t>
             </a:r>
             <a:endParaRPr lang="en-US" sz="1000" dirty="0"/>
           </a:p>
@@ -6363,13 +6305,13 @@
       </p:sp>
       <p:sp>
         <p:nvSpPr>
-          <p:cNvPr id="26" name="Shape 24"/>
-          <p:cNvSpPr/>
-          <p:nvPr/>
-        </p:nvSpPr>
-        <p:spPr>
-          <a:xfrm>
-            <a:off x="3291840" y="4114800"/>
+          <p:cNvPr id="25" name="Shape 23"/>
+          <p:cNvSpPr/>
+          <p:nvPr/>
+        </p:nvSpPr>
+        <p:spPr>
+          <a:xfrm>
+            <a:off x="6126480" y="4114800"/>
             <a:ext cx="2697480" cy="2377440"/>
           </a:xfrm>
           <a:prstGeom prst="roundRect">
@@ -6390,72 +6332,72 @@
       </p:sp>
       <p:sp>
         <p:nvSpPr>
-          <p:cNvPr id="27" name="Shape 25"/>
-          <p:cNvSpPr/>
-          <p:nvPr/>
-        </p:nvSpPr>
-        <p:spPr>
-          <a:xfrm>
-            <a:off x="3291840" y="4114800"/>
+          <p:cNvPr id="26" name="Shape 24"/>
+          <p:cNvSpPr/>
+          <p:nvPr/>
+        </p:nvSpPr>
+        <p:spPr>
+          <a:xfrm>
+            <a:off x="6126480" y="4114800"/>
             <a:ext cx="2697480" cy="365760"/>
           </a:xfrm>
           <a:prstGeom prst="rect">
             <a:avLst/>
           </a:prstGeom>
           <a:solidFill>
-            <a:srgbClr val="009845"/>
+            <a:srgbClr val="19416C"/>
           </a:solidFill>
           <a:ln/>
         </p:spPr>
       </p:sp>
       <p:sp>
         <p:nvSpPr>
+          <p:cNvPr id="27" name="Text 25"/>
+          <p:cNvSpPr/>
+          <p:nvPr/>
+        </p:nvSpPr>
+        <p:spPr>
+          <a:xfrm>
+            <a:off x="6263640" y="4169664"/>
+            <a:ext cx="2377440" cy="274320"/>
+          </a:xfrm>
+          <a:prstGeom prst="rect">
+            <a:avLst/>
+          </a:prstGeom>
+          <a:noFill/>
+          <a:ln/>
+        </p:spPr>
+        <p:txBody>
+          <a:bodyPr wrap="square" rtlCol="0" anchor="ctr"/>
+          <a:lstStyle/>
+          <a:p>
+            <a:pPr indent="0" marL="0">
+              <a:buNone/>
+            </a:pPr>
+            <a:r>
+              <a:rPr lang="en-US" sz="1200" b="1" dirty="0">
+                <a:solidFill>
+                  <a:srgbClr val="FFFFFF"/>
+                </a:solidFill>
+                <a:latin typeface="Inter" pitchFamily="34" charset="0"/>
+                <a:ea typeface="Inter" pitchFamily="34" charset="-122"/>
+                <a:cs typeface="Inter" pitchFamily="34" charset="-120"/>
+              </a:rPr>
+              <a:t>Exporters</a:t>
+            </a:r>
+            <a:endParaRPr lang="en-US" sz="1200" dirty="0"/>
+          </a:p>
+        </p:txBody>
+      </p:sp>
+      <p:sp>
+        <p:nvSpPr>
           <p:cNvPr id="28" name="Text 26"/>
           <p:cNvSpPr/>
           <p:nvPr/>
         </p:nvSpPr>
         <p:spPr>
           <a:xfrm>
-            <a:off x="3429000" y="4169664"/>
-            <a:ext cx="2377440" cy="274320"/>
-          </a:xfrm>
-          <a:prstGeom prst="rect">
-            <a:avLst/>
-          </a:prstGeom>
-          <a:noFill/>
-          <a:ln/>
-        </p:spPr>
-        <p:txBody>
-          <a:bodyPr wrap="square" rtlCol="0" anchor="ctr"/>
-          <a:lstStyle/>
-          <a:p>
-            <a:pPr indent="0" marL="0">
-              <a:buNone/>
-            </a:pPr>
-            <a:r>
-              <a:rPr lang="en-US" sz="1200" b="1" dirty="0">
-                <a:solidFill>
-                  <a:srgbClr val="FFFFFF"/>
-                </a:solidFill>
-                <a:latin typeface="Inter" pitchFamily="34" charset="0"/>
-                <a:ea typeface="Inter" pitchFamily="34" charset="-122"/>
-                <a:cs typeface="Inter" pitchFamily="34" charset="-120"/>
-              </a:rPr>
-              <a:t>Qlik Cloud</a:t>
-            </a:r>
-            <a:endParaRPr lang="en-US" sz="1200" dirty="0"/>
-          </a:p>
-        </p:txBody>
-      </p:sp>
-      <p:sp>
-        <p:nvSpPr>
-          <p:cNvPr id="29" name="Text 27"/>
-          <p:cNvSpPr/>
-          <p:nvPr/>
-        </p:nvSpPr>
-        <p:spPr>
-          <a:xfrm>
-            <a:off x="3429000" y="4617720"/>
+            <a:off x="6263640" y="4617720"/>
             <a:ext cx="2423160" cy="1828800"/>
           </a:xfrm>
           <a:prstGeom prst="rect">
@@ -6480,7 +6422,7 @@
                 <a:ea typeface="Inter" pitchFamily="34" charset="-122"/>
                 <a:cs typeface="Inter" pitchFamily="34" charset="-120"/>
               </a:rPr>
-              <a:t>Add / edit / delete tenants. Tenant URL + API key + Data Files connection ID. Test against /api/v1/users/me.</a:t>
+              <a:t>Live status of every Python exporter (Docker-aware). Start / Stop with one click. Shows active series count.</a:t>
             </a:r>
             <a:endParaRPr lang="en-US" sz="1000" dirty="0"/>
           </a:p>
@@ -6488,13 +6430,13 @@
       </p:sp>
       <p:sp>
         <p:nvSpPr>
-          <p:cNvPr id="30" name="Shape 28"/>
-          <p:cNvSpPr/>
-          <p:nvPr/>
-        </p:nvSpPr>
-        <p:spPr>
-          <a:xfrm>
-            <a:off x="6126480" y="4114800"/>
+          <p:cNvPr id="29" name="Shape 27"/>
+          <p:cNvSpPr/>
+          <p:nvPr/>
+        </p:nvSpPr>
+        <p:spPr>
+          <a:xfrm>
+            <a:off x="8961120" y="4114800"/>
             <a:ext cx="2697480" cy="2377440"/>
           </a:xfrm>
           <a:prstGeom prst="roundRect">
@@ -6515,132 +6457,7 @@
       </p:sp>
       <p:sp>
         <p:nvSpPr>
-          <p:cNvPr id="31" name="Shape 29"/>
-          <p:cNvSpPr/>
-          <p:nvPr/>
-        </p:nvSpPr>
-        <p:spPr>
-          <a:xfrm>
-            <a:off x="6126480" y="4114800"/>
-            <a:ext cx="2697480" cy="365760"/>
-          </a:xfrm>
-          <a:prstGeom prst="rect">
-            <a:avLst/>
-          </a:prstGeom>
-          <a:solidFill>
-            <a:srgbClr val="19416C"/>
-          </a:solidFill>
-          <a:ln/>
-        </p:spPr>
-      </p:sp>
-      <p:sp>
-        <p:nvSpPr>
-          <p:cNvPr id="32" name="Text 30"/>
-          <p:cNvSpPr/>
-          <p:nvPr/>
-        </p:nvSpPr>
-        <p:spPr>
-          <a:xfrm>
-            <a:off x="6263640" y="4169664"/>
-            <a:ext cx="2377440" cy="274320"/>
-          </a:xfrm>
-          <a:prstGeom prst="rect">
-            <a:avLst/>
-          </a:prstGeom>
-          <a:noFill/>
-          <a:ln/>
-        </p:spPr>
-        <p:txBody>
-          <a:bodyPr wrap="square" rtlCol="0" anchor="ctr"/>
-          <a:lstStyle/>
-          <a:p>
-            <a:pPr indent="0" marL="0">
-              <a:buNone/>
-            </a:pPr>
-            <a:r>
-              <a:rPr lang="en-US" sz="1200" b="1" dirty="0">
-                <a:solidFill>
-                  <a:srgbClr val="FFFFFF"/>
-                </a:solidFill>
-                <a:latin typeface="Inter" pitchFamily="34" charset="0"/>
-                <a:ea typeface="Inter" pitchFamily="34" charset="-122"/>
-                <a:cs typeface="Inter" pitchFamily="34" charset="-120"/>
-              </a:rPr>
-              <a:t>Exporters</a:t>
-            </a:r>
-            <a:endParaRPr lang="en-US" sz="1200" dirty="0"/>
-          </a:p>
-        </p:txBody>
-      </p:sp>
-      <p:sp>
-        <p:nvSpPr>
-          <p:cNvPr id="33" name="Text 31"/>
-          <p:cNvSpPr/>
-          <p:nvPr/>
-        </p:nvSpPr>
-        <p:spPr>
-          <a:xfrm>
-            <a:off x="6263640" y="4617720"/>
-            <a:ext cx="2423160" cy="1828800"/>
-          </a:xfrm>
-          <a:prstGeom prst="rect">
-            <a:avLst/>
-          </a:prstGeom>
-          <a:noFill/>
-          <a:ln/>
-        </p:spPr>
-        <p:txBody>
-          <a:bodyPr wrap="square" rtlCol="0" anchor="ctr"/>
-          <a:lstStyle/>
-          <a:p>
-            <a:pPr indent="0" marL="0">
-              <a:buNone/>
-            </a:pPr>
-            <a:r>
-              <a:rPr lang="en-US" sz="1000" dirty="0">
-                <a:solidFill>
-                  <a:srgbClr val="2D3543"/>
-                </a:solidFill>
-                <a:latin typeface="Inter" pitchFamily="34" charset="0"/>
-                <a:ea typeface="Inter" pitchFamily="34" charset="-122"/>
-                <a:cs typeface="Inter" pitchFamily="34" charset="-120"/>
-              </a:rPr>
-              <a:t>Live status of every Python exporter (Docker-aware). Start / Stop with one click. Shows active series count.</a:t>
-            </a:r>
-            <a:endParaRPr lang="en-US" sz="1000" dirty="0"/>
-          </a:p>
-        </p:txBody>
-      </p:sp>
-      <p:sp>
-        <p:nvSpPr>
-          <p:cNvPr id="34" name="Shape 32"/>
-          <p:cNvSpPr/>
-          <p:nvPr/>
-        </p:nvSpPr>
-        <p:spPr>
-          <a:xfrm>
-            <a:off x="8961120" y="4114800"/>
-            <a:ext cx="2697480" cy="2377440"/>
-          </a:xfrm>
-          <a:prstGeom prst="roundRect">
-            <a:avLst>
-              <a:gd name="adj" fmla="val 2308"/>
-            </a:avLst>
-          </a:prstGeom>
-          <a:solidFill>
-            <a:srgbClr val="FFFFFF"/>
-          </a:solidFill>
-          <a:ln w="6350">
-            <a:solidFill>
-              <a:srgbClr val="A9B3B6"/>
-            </a:solidFill>
-            <a:prstDash val="solid"/>
-          </a:ln>
-        </p:spPr>
-      </p:sp>
-      <p:sp>
-        <p:nvSpPr>
-          <p:cNvPr id="35" name="Shape 33"/>
+          <p:cNvPr id="30" name="Shape 28"/>
           <p:cNvSpPr/>
           <p:nvPr/>
         </p:nvSpPr>
@@ -6660,7 +6477,7 @@
       </p:sp>
       <p:sp>
         <p:nvSpPr>
-          <p:cNvPr id="36" name="Text 34"/>
+          <p:cNvPr id="31" name="Text 29"/>
           <p:cNvSpPr/>
           <p:nvPr/>
         </p:nvSpPr>
@@ -6699,7 +6516,7 @@
       </p:sp>
       <p:sp>
         <p:nvSpPr>
-          <p:cNvPr id="37" name="Text 35"/>
+          <p:cNvPr id="32" name="Text 30"/>
           <p:cNvSpPr/>
           <p:nvPr/>
         </p:nvSpPr>

--- a/Qlik-Observability-Toolkit-Architecture.pptx
+++ b/Qlik-Observability-Toolkit-Architecture.pptx
@@ -1476,7 +1476,7 @@
                 <a:ea typeface="Inter" pitchFamily="34" charset="-122"/>
                 <a:cs typeface="Inter" pitchFamily="34" charset="-120"/>
               </a:rPr>
-              <a:t>9</a:t>
+              <a:t>8 + 8</a:t>
             </a:r>
             <a:endParaRPr lang="en-US" sz="3000" dirty="0"/>
           </a:p>
@@ -1554,7 +1554,7 @@
                 <a:ea typeface="Inter" pitchFamily="34" charset="-122"/>
                 <a:cs typeface="Inter" pitchFamily="34" charset="-120"/>
               </a:rPr>
-              <a:t>Read-only Talend observability surface (+ tenant-discovery meta-tool), auto-generated from OpenAPI specs.</a:t>
+              <a:t>Read-only Talend (8) + Qlik Cloud (8) observability tools, tenancy-aware, + the tenant-discovery meta-tool.</a:t>
             </a:r>
             <a:endParaRPr lang="en-US" sz="1100" dirty="0"/>
           </a:p>
@@ -2784,7 +2784,7 @@
                 <a:ea typeface="Inter" pitchFamily="34" charset="-122"/>
                 <a:cs typeface="Inter" pitchFamily="34" charset="-120"/>
               </a:rPr>
-              <a:t>stdio · per-tenant routing · observability preset</a:t>
+              <a:t>stdio · per-tenant routing · Talend + Qlik obs tools</a:t>
             </a:r>
             <a:endParaRPr lang="en-US" sz="900" dirty="0"/>
           </a:p>
@@ -5984,7 +5984,7 @@
         <p:spPr>
           <a:xfrm>
             <a:off x="6263640" y="1874520"/>
-            <a:ext cx="5303520" cy="1463040"/>
+            <a:ext cx="5303520" cy="1508760"/>
           </a:xfrm>
           <a:prstGeom prst="rect">
             <a:avLst/>
@@ -6008,7 +6008,7 @@
                 <a:ea typeface="Inter" pitchFamily="34" charset="-122"/>
                 <a:cs typeface="Inter" pitchFamily="34" charset="-120"/>
               </a:rPr>
-              <a:t>No orchestration or admin endpoints are exposed. The MCP server defaults to the observability preset; only the observability and logging presets ship. Need a wider surface? Pass an explicit TMC_APIS=&lt;comma,list&gt; — but the product is scoped to read-only observability.</a:t>
+              <a:t>No orchestration or admin endpoints are exposed. Talend presets: observability (default) + logging. Qlik Cloud adds a read-only qlik_observability__* tool family (apps, reloads, audits, quotas, spaces, users) — every tool is tenancy-aware. Need a wider Talend surface? Pass an explicit TMC_APIS=&lt;comma,list&gt;.</a:t>
             </a:r>
             <a:endParaRPr lang="en-US" sz="1000" dirty="0"/>
           </a:p>

--- a/Qlik-Observability-Toolkit-Architecture.pptx
+++ b/Qlik-Observability-Toolkit-Architecture.pptx
@@ -1259,34 +1259,34 @@
         </p:nvSpPr>
         <p:spPr>
           <a:xfrm>
-            <a:off x="914400" y="1280160"/>
-            <a:ext cx="10515600" cy="548640"/>
-          </a:xfrm>
-          <a:prstGeom prst="rect">
-            <a:avLst/>
-          </a:prstGeom>
-          <a:noFill/>
-          <a:ln/>
-        </p:spPr>
-        <p:txBody>
-          <a:bodyPr wrap="square" rtlCol="0" anchor="ctr"/>
-          <a:lstStyle/>
-          <a:p>
-            <a:pPr indent="0" marL="0">
-              <a:buNone/>
-            </a:pPr>
-            <a:r>
-              <a:rPr lang="en-US" sz="2200" dirty="0">
-                <a:solidFill>
-                  <a:srgbClr val="006580"/>
-                </a:solidFill>
-                <a:latin typeface="Inter" pitchFamily="34" charset="0"/>
-                <a:ea typeface="Inter" pitchFamily="34" charset="-122"/>
-                <a:cs typeface="Inter" pitchFamily="34" charset="-120"/>
-              </a:rPr>
-              <a:t>Talend Cloud × Qlik Cloud</a:t>
-            </a:r>
-            <a:endParaRPr lang="en-US" sz="2200" dirty="0"/>
+            <a:off x="914400" y="1371600"/>
+            <a:ext cx="10515600" cy="365760"/>
+          </a:xfrm>
+          <a:prstGeom prst="rect">
+            <a:avLst/>
+          </a:prstGeom>
+          <a:noFill/>
+          <a:ln/>
+        </p:spPr>
+        <p:txBody>
+          <a:bodyPr wrap="square" rtlCol="0" anchor="ctr"/>
+          <a:lstStyle/>
+          <a:p>
+            <a:pPr indent="0" marL="0">
+              <a:buNone/>
+            </a:pPr>
+            <a:r>
+              <a:rPr lang="en-US" sz="1500" b="1" spc="200" kern="0" dirty="0">
+                <a:solidFill>
+                  <a:srgbClr val="009845"/>
+                </a:solidFill>
+                <a:latin typeface="Inter" pitchFamily="34" charset="0"/>
+                <a:ea typeface="Inter" pitchFamily="34" charset="-122"/>
+                <a:cs typeface="Inter" pitchFamily="34" charset="-120"/>
+              </a:rPr>
+              <a:t>TALEND CLOUD × QLIK CLOUD</a:t>
+            </a:r>
+            <a:endParaRPr lang="en-US" sz="1500" dirty="0"/>
           </a:p>
         </p:txBody>
       </p:sp>
@@ -1356,13 +1356,13 @@
             <a:r>
               <a:rPr lang="en-US" sz="1600" dirty="0">
                 <a:solidFill>
-                  <a:srgbClr val="A9B3B6"/>
-                </a:solidFill>
-                <a:latin typeface="Inter" pitchFamily="34" charset="0"/>
-                <a:ea typeface="Inter" pitchFamily="34" charset="-122"/>
-                <a:cs typeface="Inter" pitchFamily="34" charset="-120"/>
-              </a:rPr>
-              <a:t>MCP server · Prometheus · Loki · Grafana · Python exporters · Qlik Sense apps</a:t>
+                  <a:srgbClr val="545659"/>
+                </a:solidFill>
+                <a:latin typeface="Inter" pitchFamily="34" charset="0"/>
+                <a:ea typeface="Inter" pitchFamily="34" charset="-122"/>
+                <a:cs typeface="Inter" pitchFamily="34" charset="-120"/>
+              </a:rPr>
+              <a:t>MCP server · Prometheus · Loki · Grafana · Python exporters · OpenTelemetry · Qlik Sense</a:t>
             </a:r>
             <a:endParaRPr lang="en-US" sz="1600" dirty="0"/>
           </a:p>
@@ -1548,7 +1548,7 @@
             <a:r>
               <a:rPr lang="en-US" sz="1100" dirty="0">
                 <a:solidFill>
-                  <a:srgbClr val="A9B3B6"/>
+                  <a:srgbClr val="545659"/>
                 </a:solidFill>
                 <a:latin typeface="Inter" pitchFamily="34" charset="0"/>
                 <a:ea typeface="Inter" pitchFamily="34" charset="-122"/>
@@ -1692,7 +1692,7 @@
             <a:r>
               <a:rPr lang="en-US" sz="1100" dirty="0">
                 <a:solidFill>
-                  <a:srgbClr val="A9B3B6"/>
+                  <a:srgbClr val="545659"/>
                 </a:solidFill>
                 <a:latin typeface="Inter" pitchFamily="34" charset="0"/>
                 <a:ea typeface="Inter" pitchFamily="34" charset="-122"/>
@@ -1836,7 +1836,7 @@
             <a:r>
               <a:rPr lang="en-US" sz="1100" dirty="0">
                 <a:solidFill>
-                  <a:srgbClr val="A9B3B6"/>
+                  <a:srgbClr val="545659"/>
                 </a:solidFill>
                 <a:latin typeface="Inter" pitchFamily="34" charset="0"/>
                 <a:ea typeface="Inter" pitchFamily="34" charset="-122"/>
@@ -1880,64 +1880,34 @@
           <a:chExt cx="0" cy="0"/>
         </a:xfrm>
       </p:grpSpPr>
-      <p:pic>
-        <p:nvPicPr>
-          <p:cNvPr id="2" name="Image 0" descr="deploy/assets/qlik-logo.svg">    </p:cNvPr>
-          <p:cNvPicPr>
-            <a:picLocks noChangeAspect="1"/>
-          </p:cNvPicPr>
-          <p:nvPr/>
-        </p:nvPicPr>
-        <p:blipFill>
-          <a:blip r:embed="rId1">
-            <a:extLst>
-              <a:ext uri="{96DAC541-7B7A-43D3-8B79-37D633B846F1}">
-                <asvg:svgBlip xmlns:asvg="http://schemas.microsoft.com/office/drawing/2016/SVG/main" r:embed="rId2"/>
-              </a:ext>
-            </a:extLst>
-          </a:blip>
-          <a:stretch>
-            <a:fillRect/>
-          </a:stretch>
-        </p:blipFill>
-        <p:spPr>
-          <a:xfrm>
-            <a:off x="10515600" y="292608"/>
-            <a:ext cx="1234440" cy="685800"/>
-          </a:xfrm>
-          <a:prstGeom prst="rect">
-            <a:avLst/>
-          </a:prstGeom>
-        </p:spPr>
-      </p:pic>
-      <p:sp>
-        <p:nvSpPr>
-          <p:cNvPr id="3" name="Text 0"/>
-          <p:cNvSpPr/>
-          <p:nvPr/>
-        </p:nvSpPr>
-        <p:spPr>
-          <a:xfrm>
-            <a:off x="457200" y="274320"/>
-            <a:ext cx="9692640" cy="502920"/>
-          </a:xfrm>
-          <a:prstGeom prst="rect">
-            <a:avLst/>
-          </a:prstGeom>
-          <a:noFill/>
-          <a:ln/>
-        </p:spPr>
-        <p:txBody>
-          <a:bodyPr wrap="square" rtlCol="0" anchor="ctr"/>
-          <a:lstStyle/>
-          <a:p>
-            <a:pPr indent="0" marL="0">
-              <a:buNone/>
-            </a:pPr>
-            <a:r>
-              <a:rPr lang="en-US" sz="2500" b="1" dirty="0">
-                <a:solidFill>
-                  <a:srgbClr val="006580"/>
+      <p:sp>
+        <p:nvSpPr>
+          <p:cNvPr id="2" name="Text 0"/>
+          <p:cNvSpPr/>
+          <p:nvPr/>
+        </p:nvSpPr>
+        <p:spPr>
+          <a:xfrm>
+            <a:off x="1874520" y="310896"/>
+            <a:ext cx="9509760" cy="502920"/>
+          </a:xfrm>
+          <a:prstGeom prst="rect">
+            <a:avLst/>
+          </a:prstGeom>
+          <a:noFill/>
+          <a:ln/>
+        </p:spPr>
+        <p:txBody>
+          <a:bodyPr wrap="square" rtlCol="0" anchor="ctr"/>
+          <a:lstStyle/>
+          <a:p>
+            <a:pPr indent="0" marL="0">
+              <a:buNone/>
+            </a:pPr>
+            <a:r>
+              <a:rPr lang="en-US" sz="2400" b="1" spc="-30" kern="0" dirty="0">
+                <a:solidFill>
+                  <a:srgbClr val="2D3543"/>
                 </a:solidFill>
                 <a:latin typeface="Inter" pitchFamily="34" charset="0"/>
                 <a:ea typeface="Inter" pitchFamily="34" charset="-122"/>
@@ -1945,20 +1915,20 @@
               </a:rPr>
               <a:t>Qlik Observability Toolkit — architecture</a:t>
             </a:r>
-            <a:endParaRPr lang="en-US" sz="2500" dirty="0"/>
-          </a:p>
-        </p:txBody>
-      </p:sp>
-      <p:sp>
-        <p:nvSpPr>
-          <p:cNvPr id="4" name="Text 1"/>
-          <p:cNvSpPr/>
-          <p:nvPr/>
-        </p:nvSpPr>
-        <p:spPr>
-          <a:xfrm>
-            <a:off x="457200" y="777240"/>
-            <a:ext cx="9692640" cy="320040"/>
+            <a:endParaRPr lang="en-US" sz="2400" dirty="0"/>
+          </a:p>
+        </p:txBody>
+      </p:sp>
+      <p:sp>
+        <p:nvSpPr>
+          <p:cNvPr id="3" name="Text 1"/>
+          <p:cNvSpPr/>
+          <p:nvPr/>
+        </p:nvSpPr>
+        <p:spPr>
+          <a:xfrm>
+            <a:off x="1874520" y="804672"/>
+            <a:ext cx="9509760" cy="320040"/>
           </a:xfrm>
           <a:prstGeom prst="rect">
             <a:avLst/>
@@ -1976,13 +1946,13 @@
             <a:r>
               <a:rPr lang="en-US" sz="1250" dirty="0">
                 <a:solidFill>
-                  <a:srgbClr val="A9B3B6"/>
-                </a:solidFill>
-                <a:latin typeface="Inter" pitchFamily="34" charset="0"/>
-                <a:ea typeface="Inter" pitchFamily="34" charset="-122"/>
-                <a:cs typeface="Inter" pitchFamily="34" charset="-120"/>
-              </a:rPr>
-              <a:t>Three planes: data sources → collection &amp; control → storage, visualization &amp; analytics.</a:t>
+                  <a:srgbClr val="545659"/>
+                </a:solidFill>
+                <a:latin typeface="Inter" pitchFamily="34" charset="0"/>
+                <a:ea typeface="Inter" pitchFamily="34" charset="-122"/>
+                <a:cs typeface="Inter" pitchFamily="34" charset="-120"/>
+              </a:rPr>
+              <a:t>Data sources → collection &amp; control → store, visualize &amp; analyze — with telemetry export.</a:t>
             </a:r>
             <a:endParaRPr lang="en-US" sz="1250" dirty="0"/>
           </a:p>
@@ -1990,14 +1960,14 @@
       </p:sp>
       <p:sp>
         <p:nvSpPr>
-          <p:cNvPr id="5" name="Shape 2"/>
-          <p:cNvSpPr/>
-          <p:nvPr/>
-        </p:nvSpPr>
-        <p:spPr>
-          <a:xfrm>
-            <a:off x="457200" y="1325880"/>
-            <a:ext cx="3383280" cy="4572000"/>
+          <p:cNvPr id="4" name="Shape 2"/>
+          <p:cNvSpPr/>
+          <p:nvPr/>
+        </p:nvSpPr>
+        <p:spPr>
+          <a:xfrm>
+            <a:off x="457200" y="1280160"/>
+            <a:ext cx="3383280" cy="3931920"/>
           </a:xfrm>
           <a:prstGeom prst="roundRect">
             <a:avLst>
@@ -2017,13 +1987,13 @@
       </p:sp>
       <p:sp>
         <p:nvSpPr>
-          <p:cNvPr id="6" name="Text 3"/>
-          <p:cNvSpPr/>
-          <p:nvPr/>
-        </p:nvSpPr>
-        <p:spPr>
-          <a:xfrm>
-            <a:off x="594360" y="1435608"/>
+          <p:cNvPr id="5" name="Text 3"/>
+          <p:cNvSpPr/>
+          <p:nvPr/>
+        </p:nvSpPr>
+        <p:spPr>
+          <a:xfrm>
+            <a:off x="594360" y="1389888"/>
             <a:ext cx="3108960" cy="274320"/>
           </a:xfrm>
           <a:prstGeom prst="rect">
@@ -2042,7 +2012,7 @@
             <a:r>
               <a:rPr lang="en-US" sz="1100" b="1" spc="100" kern="0" dirty="0">
                 <a:solidFill>
-                  <a:srgbClr val="006580"/>
+                  <a:srgbClr val="009845"/>
                 </a:solidFill>
                 <a:latin typeface="Inter" pitchFamily="34" charset="0"/>
                 <a:ea typeface="Inter" pitchFamily="34" charset="-122"/>
@@ -2056,18 +2026,18 @@
       </p:sp>
       <p:sp>
         <p:nvSpPr>
-          <p:cNvPr id="7" name="Shape 4"/>
-          <p:cNvSpPr/>
-          <p:nvPr/>
-        </p:nvSpPr>
-        <p:spPr>
-          <a:xfrm>
-            <a:off x="4114800" y="1325880"/>
-            <a:ext cx="4160520" cy="4572000"/>
+          <p:cNvPr id="6" name="Shape 4"/>
+          <p:cNvSpPr/>
+          <p:nvPr/>
+        </p:nvSpPr>
+        <p:spPr>
+          <a:xfrm>
+            <a:off x="4114800" y="1280160"/>
+            <a:ext cx="4160520" cy="3931920"/>
           </a:xfrm>
           <a:prstGeom prst="roundRect">
             <a:avLst>
-              <a:gd name="adj" fmla="val 1758"/>
+              <a:gd name="adj" fmla="val 1860"/>
             </a:avLst>
           </a:prstGeom>
           <a:solidFill>
@@ -2083,13 +2053,13 @@
       </p:sp>
       <p:sp>
         <p:nvSpPr>
-          <p:cNvPr id="8" name="Text 5"/>
-          <p:cNvSpPr/>
-          <p:nvPr/>
-        </p:nvSpPr>
-        <p:spPr>
-          <a:xfrm>
-            <a:off x="4251960" y="1435608"/>
+          <p:cNvPr id="7" name="Text 5"/>
+          <p:cNvSpPr/>
+          <p:nvPr/>
+        </p:nvSpPr>
+        <p:spPr>
+          <a:xfrm>
+            <a:off x="4251960" y="1389888"/>
             <a:ext cx="3886200" cy="274320"/>
           </a:xfrm>
           <a:prstGeom prst="rect">
@@ -2108,7 +2078,7 @@
             <a:r>
               <a:rPr lang="en-US" sz="1100" b="1" spc="100" kern="0" dirty="0">
                 <a:solidFill>
-                  <a:srgbClr val="006580"/>
+                  <a:srgbClr val="009845"/>
                 </a:solidFill>
                 <a:latin typeface="Inter" pitchFamily="34" charset="0"/>
                 <a:ea typeface="Inter" pitchFamily="34" charset="-122"/>
@@ -2122,14 +2092,14 @@
       </p:sp>
       <p:sp>
         <p:nvSpPr>
-          <p:cNvPr id="9" name="Shape 6"/>
-          <p:cNvSpPr/>
-          <p:nvPr/>
-        </p:nvSpPr>
-        <p:spPr>
-          <a:xfrm>
-            <a:off x="8549640" y="1325880"/>
-            <a:ext cx="3154680" cy="4572000"/>
+          <p:cNvPr id="8" name="Shape 6"/>
+          <p:cNvSpPr/>
+          <p:nvPr/>
+        </p:nvSpPr>
+        <p:spPr>
+          <a:xfrm>
+            <a:off x="8549640" y="1280160"/>
+            <a:ext cx="3154680" cy="3931920"/>
           </a:xfrm>
           <a:prstGeom prst="roundRect">
             <a:avLst>
@@ -2149,13 +2119,13 @@
       </p:sp>
       <p:sp>
         <p:nvSpPr>
-          <p:cNvPr id="10" name="Text 7"/>
-          <p:cNvSpPr/>
-          <p:nvPr/>
-        </p:nvSpPr>
-        <p:spPr>
-          <a:xfrm>
-            <a:off x="8686800" y="1435608"/>
+          <p:cNvPr id="9" name="Text 7"/>
+          <p:cNvSpPr/>
+          <p:nvPr/>
+        </p:nvSpPr>
+        <p:spPr>
+          <a:xfrm>
+            <a:off x="8686800" y="1389888"/>
             <a:ext cx="2880360" cy="274320"/>
           </a:xfrm>
           <a:prstGeom prst="rect">
@@ -2174,7 +2144,7 @@
             <a:r>
               <a:rPr lang="en-US" sz="1100" b="1" spc="100" kern="0" dirty="0">
                 <a:solidFill>
-                  <a:srgbClr val="006580"/>
+                  <a:srgbClr val="009845"/>
                 </a:solidFill>
                 <a:latin typeface="Inter" pitchFamily="34" charset="0"/>
                 <a:ea typeface="Inter" pitchFamily="34" charset="-122"/>
@@ -2188,13 +2158,13 @@
       </p:sp>
       <p:sp>
         <p:nvSpPr>
-          <p:cNvPr id="11" name="Shape 8"/>
-          <p:cNvSpPr/>
-          <p:nvPr/>
-        </p:nvSpPr>
-        <p:spPr>
-          <a:xfrm>
-            <a:off x="594360" y="1783080"/>
+          <p:cNvPr id="10" name="Shape 8"/>
+          <p:cNvSpPr/>
+          <p:nvPr/>
+        </p:nvSpPr>
+        <p:spPr>
+          <a:xfrm>
+            <a:off x="594360" y="1691640"/>
             <a:ext cx="3108960" cy="868680"/>
           </a:xfrm>
           <a:prstGeom prst="roundRect">
@@ -2215,13 +2185,13 @@
       </p:sp>
       <p:sp>
         <p:nvSpPr>
-          <p:cNvPr id="12" name="Shape 9"/>
-          <p:cNvSpPr/>
-          <p:nvPr/>
-        </p:nvSpPr>
-        <p:spPr>
-          <a:xfrm>
-            <a:off x="594360" y="1783080"/>
+          <p:cNvPr id="11" name="Shape 9"/>
+          <p:cNvSpPr/>
+          <p:nvPr/>
+        </p:nvSpPr>
+        <p:spPr>
+          <a:xfrm>
+            <a:off x="594360" y="1691640"/>
             <a:ext cx="91440" cy="868680"/>
           </a:xfrm>
           <a:prstGeom prst="roundRect">
@@ -2237,22 +2207,22 @@
       </p:sp>
       <p:pic>
         <p:nvPicPr>
-          <p:cNvPr id="13" name="Image 1" descr="deploy/assets/icons/talend-cloud.png">    </p:cNvPr>
+          <p:cNvPr id="12" name="Image 0" descr="deploy/assets/icons/talend-cloud.png">    </p:cNvPr>
           <p:cNvPicPr>
             <a:picLocks noChangeAspect="1"/>
           </p:cNvPicPr>
           <p:nvPr/>
         </p:nvPicPr>
         <p:blipFill>
-          <a:blip r:embed="rId3"/>
+          <a:blip r:embed="rId1"/>
           <a:stretch>
             <a:fillRect/>
           </a:stretch>
         </p:blipFill>
         <p:spPr>
           <a:xfrm>
-            <a:off x="813816" y="1933956"/>
-            <a:ext cx="566928" cy="566928"/>
+            <a:off x="813816" y="1860804"/>
+            <a:ext cx="530352" cy="530352"/>
           </a:xfrm>
           <a:prstGeom prst="rect">
             <a:avLst/>
@@ -2261,14 +2231,14 @@
       </p:pic>
       <p:sp>
         <p:nvSpPr>
-          <p:cNvPr id="14" name="Text 10"/>
-          <p:cNvSpPr/>
-          <p:nvPr/>
-        </p:nvSpPr>
-        <p:spPr>
-          <a:xfrm>
-            <a:off x="1508760" y="1892808"/>
-            <a:ext cx="2103120" cy="310896"/>
+          <p:cNvPr id="13" name="Text 10"/>
+          <p:cNvSpPr/>
+          <p:nvPr/>
+        </p:nvSpPr>
+        <p:spPr>
+          <a:xfrm>
+            <a:off x="1508760" y="1801368"/>
+            <a:ext cx="2103120" cy="292608"/>
           </a:xfrm>
           <a:prstGeom prst="rect">
             <a:avLst/>
@@ -2300,13 +2270,13 @@
       </p:sp>
       <p:sp>
         <p:nvSpPr>
-          <p:cNvPr id="15" name="Text 11"/>
-          <p:cNvSpPr/>
-          <p:nvPr/>
-        </p:nvSpPr>
-        <p:spPr>
-          <a:xfrm>
-            <a:off x="1508760" y="2185416"/>
+          <p:cNvPr id="14" name="Text 11"/>
+          <p:cNvSpPr/>
+          <p:nvPr/>
+        </p:nvSpPr>
+        <p:spPr>
+          <a:xfrm>
+            <a:off x="1508760" y="2093976"/>
             <a:ext cx="2103120" cy="393192"/>
           </a:xfrm>
           <a:prstGeom prst="rect">
@@ -2325,7 +2295,7 @@
             <a:r>
               <a:rPr lang="en-US" sz="900" dirty="0">
                 <a:solidFill>
-                  <a:srgbClr val="A9B3B6"/>
+                  <a:srgbClr val="545659"/>
                 </a:solidFill>
                 <a:latin typeface="Inter" pitchFamily="34" charset="0"/>
                 <a:ea typeface="Inter" pitchFamily="34" charset="-122"/>
@@ -2339,13 +2309,13 @@
       </p:sp>
       <p:sp>
         <p:nvSpPr>
-          <p:cNvPr id="16" name="Shape 12"/>
-          <p:cNvSpPr/>
-          <p:nvPr/>
-        </p:nvSpPr>
-        <p:spPr>
-          <a:xfrm>
-            <a:off x="594360" y="2926080"/>
+          <p:cNvPr id="15" name="Shape 12"/>
+          <p:cNvSpPr/>
+          <p:nvPr/>
+        </p:nvSpPr>
+        <p:spPr>
+          <a:xfrm>
+            <a:off x="594360" y="2834640"/>
             <a:ext cx="3108960" cy="868680"/>
           </a:xfrm>
           <a:prstGeom prst="roundRect">
@@ -2366,13 +2336,13 @@
       </p:sp>
       <p:sp>
         <p:nvSpPr>
-          <p:cNvPr id="17" name="Shape 13"/>
-          <p:cNvSpPr/>
-          <p:nvPr/>
-        </p:nvSpPr>
-        <p:spPr>
-          <a:xfrm>
-            <a:off x="594360" y="2926080"/>
+          <p:cNvPr id="16" name="Shape 13"/>
+          <p:cNvSpPr/>
+          <p:nvPr/>
+        </p:nvSpPr>
+        <p:spPr>
+          <a:xfrm>
+            <a:off x="594360" y="2834640"/>
             <a:ext cx="91440" cy="868680"/>
           </a:xfrm>
           <a:prstGeom prst="roundRect">
@@ -2388,22 +2358,22 @@
       </p:sp>
       <p:pic>
         <p:nvPicPr>
-          <p:cNvPr id="18" name="Image 2" descr="deploy/assets/icons/qlik-cloud.png">    </p:cNvPr>
+          <p:cNvPr id="17" name="Image 1" descr="deploy/assets/icons/qlik-cloud.png">    </p:cNvPr>
           <p:cNvPicPr>
             <a:picLocks noChangeAspect="1"/>
           </p:cNvPicPr>
           <p:nvPr/>
         </p:nvPicPr>
         <p:blipFill>
-          <a:blip r:embed="rId4"/>
+          <a:blip r:embed="rId2"/>
           <a:stretch>
             <a:fillRect/>
           </a:stretch>
         </p:blipFill>
         <p:spPr>
           <a:xfrm>
-            <a:off x="813816" y="3076956"/>
-            <a:ext cx="566928" cy="566928"/>
+            <a:off x="813816" y="3003804"/>
+            <a:ext cx="530352" cy="530352"/>
           </a:xfrm>
           <a:prstGeom prst="rect">
             <a:avLst/>
@@ -2412,14 +2382,14 @@
       </p:pic>
       <p:sp>
         <p:nvSpPr>
-          <p:cNvPr id="19" name="Text 14"/>
-          <p:cNvSpPr/>
-          <p:nvPr/>
-        </p:nvSpPr>
-        <p:spPr>
-          <a:xfrm>
-            <a:off x="1508760" y="3035808"/>
-            <a:ext cx="2103120" cy="310896"/>
+          <p:cNvPr id="18" name="Text 14"/>
+          <p:cNvSpPr/>
+          <p:nvPr/>
+        </p:nvSpPr>
+        <p:spPr>
+          <a:xfrm>
+            <a:off x="1508760" y="2944368"/>
+            <a:ext cx="2103120" cy="292608"/>
           </a:xfrm>
           <a:prstGeom prst="rect">
             <a:avLst/>
@@ -2451,13 +2421,13 @@
       </p:sp>
       <p:sp>
         <p:nvSpPr>
-          <p:cNvPr id="20" name="Text 15"/>
-          <p:cNvSpPr/>
-          <p:nvPr/>
-        </p:nvSpPr>
-        <p:spPr>
-          <a:xfrm>
-            <a:off x="1508760" y="3328416"/>
+          <p:cNvPr id="19" name="Text 15"/>
+          <p:cNvSpPr/>
+          <p:nvPr/>
+        </p:nvSpPr>
+        <p:spPr>
+          <a:xfrm>
+            <a:off x="1508760" y="3236976"/>
             <a:ext cx="2103120" cy="393192"/>
           </a:xfrm>
           <a:prstGeom prst="rect">
@@ -2476,7 +2446,7 @@
             <a:r>
               <a:rPr lang="en-US" sz="900" dirty="0">
                 <a:solidFill>
-                  <a:srgbClr val="A9B3B6"/>
+                  <a:srgbClr val="545659"/>
                 </a:solidFill>
                 <a:latin typeface="Inter" pitchFamily="34" charset="0"/>
                 <a:ea typeface="Inter" pitchFamily="34" charset="-122"/>
@@ -2490,13 +2460,13 @@
       </p:sp>
       <p:sp>
         <p:nvSpPr>
-          <p:cNvPr id="21" name="Shape 16"/>
-          <p:cNvSpPr/>
-          <p:nvPr/>
-        </p:nvSpPr>
-        <p:spPr>
-          <a:xfrm>
-            <a:off x="594360" y="4069080"/>
+          <p:cNvPr id="20" name="Shape 16"/>
+          <p:cNvSpPr/>
+          <p:nvPr/>
+        </p:nvSpPr>
+        <p:spPr>
+          <a:xfrm>
+            <a:off x="594360" y="3977640"/>
             <a:ext cx="3108960" cy="868680"/>
           </a:xfrm>
           <a:prstGeom prst="roundRect">
@@ -2517,13 +2487,13 @@
       </p:sp>
       <p:sp>
         <p:nvSpPr>
-          <p:cNvPr id="22" name="Shape 17"/>
-          <p:cNvSpPr/>
-          <p:nvPr/>
-        </p:nvSpPr>
-        <p:spPr>
-          <a:xfrm>
-            <a:off x="594360" y="4069080"/>
+          <p:cNvPr id="21" name="Shape 17"/>
+          <p:cNvSpPr/>
+          <p:nvPr/>
+        </p:nvSpPr>
+        <p:spPr>
+          <a:xfrm>
+            <a:off x="594360" y="3977640"/>
             <a:ext cx="91440" cy="868680"/>
           </a:xfrm>
           <a:prstGeom prst="roundRect">
@@ -2539,22 +2509,22 @@
       </p:sp>
       <p:pic>
         <p:nvPicPr>
-          <p:cNvPr id="23" name="Image 3" descr="deploy/assets/icons/remote-engine.png">    </p:cNvPr>
+          <p:cNvPr id="22" name="Image 2" descr="deploy/assets/icons/remote-engine.png">    </p:cNvPr>
           <p:cNvPicPr>
             <a:picLocks noChangeAspect="1"/>
           </p:cNvPicPr>
           <p:nvPr/>
         </p:nvPicPr>
         <p:blipFill>
-          <a:blip r:embed="rId5"/>
+          <a:blip r:embed="rId3"/>
           <a:stretch>
             <a:fillRect/>
           </a:stretch>
         </p:blipFill>
         <p:spPr>
           <a:xfrm>
-            <a:off x="813816" y="4219956"/>
-            <a:ext cx="566928" cy="566928"/>
+            <a:off x="813816" y="4146804"/>
+            <a:ext cx="530352" cy="530352"/>
           </a:xfrm>
           <a:prstGeom prst="rect">
             <a:avLst/>
@@ -2563,14 +2533,14 @@
       </p:pic>
       <p:sp>
         <p:nvSpPr>
-          <p:cNvPr id="24" name="Text 18"/>
-          <p:cNvSpPr/>
-          <p:nvPr/>
-        </p:nvSpPr>
-        <p:spPr>
-          <a:xfrm>
-            <a:off x="1508760" y="4178808"/>
-            <a:ext cx="2103120" cy="310896"/>
+          <p:cNvPr id="23" name="Text 18"/>
+          <p:cNvSpPr/>
+          <p:nvPr/>
+        </p:nvSpPr>
+        <p:spPr>
+          <a:xfrm>
+            <a:off x="1508760" y="4087368"/>
+            <a:ext cx="2103120" cy="292608"/>
           </a:xfrm>
           <a:prstGeom prst="rect">
             <a:avLst/>
@@ -2602,13 +2572,13 @@
       </p:sp>
       <p:sp>
         <p:nvSpPr>
-          <p:cNvPr id="25" name="Text 19"/>
-          <p:cNvSpPr/>
-          <p:nvPr/>
-        </p:nvSpPr>
-        <p:spPr>
-          <a:xfrm>
-            <a:off x="1508760" y="4471416"/>
+          <p:cNvPr id="24" name="Text 19"/>
+          <p:cNvSpPr/>
+          <p:nvPr/>
+        </p:nvSpPr>
+        <p:spPr>
+          <a:xfrm>
+            <a:off x="1508760" y="4379976"/>
             <a:ext cx="2103120" cy="393192"/>
           </a:xfrm>
           <a:prstGeom prst="rect">
@@ -2627,7 +2597,7 @@
             <a:r>
               <a:rPr lang="en-US" sz="900" dirty="0">
                 <a:solidFill>
-                  <a:srgbClr val="A9B3B6"/>
+                  <a:srgbClr val="545659"/>
                 </a:solidFill>
                 <a:latin typeface="Inter" pitchFamily="34" charset="0"/>
                 <a:ea typeface="Inter" pitchFamily="34" charset="-122"/>
@@ -2641,13 +2611,13 @@
       </p:sp>
       <p:sp>
         <p:nvSpPr>
-          <p:cNvPr id="26" name="Shape 20"/>
-          <p:cNvSpPr/>
-          <p:nvPr/>
-        </p:nvSpPr>
-        <p:spPr>
-          <a:xfrm>
-            <a:off x="4251960" y="1783080"/>
+          <p:cNvPr id="25" name="Shape 20"/>
+          <p:cNvSpPr/>
+          <p:nvPr/>
+        </p:nvSpPr>
+        <p:spPr>
+          <a:xfrm>
+            <a:off x="4251960" y="1691640"/>
             <a:ext cx="3886200" cy="868680"/>
           </a:xfrm>
           <a:prstGeom prst="roundRect">
@@ -2668,13 +2638,13 @@
       </p:sp>
       <p:sp>
         <p:nvSpPr>
-          <p:cNvPr id="27" name="Shape 21"/>
-          <p:cNvSpPr/>
-          <p:nvPr/>
-        </p:nvSpPr>
-        <p:spPr>
-          <a:xfrm>
-            <a:off x="4251960" y="1783080"/>
+          <p:cNvPr id="26" name="Shape 21"/>
+          <p:cNvSpPr/>
+          <p:nvPr/>
+        </p:nvSpPr>
+        <p:spPr>
+          <a:xfrm>
+            <a:off x="4251960" y="1691640"/>
             <a:ext cx="91440" cy="868680"/>
           </a:xfrm>
           <a:prstGeom prst="roundRect">
@@ -2690,22 +2660,22 @@
       </p:sp>
       <p:pic>
         <p:nvPicPr>
-          <p:cNvPr id="28" name="Image 4" descr="deploy/assets/icons/mcp.png">    </p:cNvPr>
+          <p:cNvPr id="27" name="Image 3" descr="deploy/assets/icons/mcp.png">    </p:cNvPr>
           <p:cNvPicPr>
             <a:picLocks noChangeAspect="1"/>
           </p:cNvPicPr>
           <p:nvPr/>
         </p:nvPicPr>
         <p:blipFill>
-          <a:blip r:embed="rId6"/>
+          <a:blip r:embed="rId4"/>
           <a:stretch>
             <a:fillRect/>
           </a:stretch>
         </p:blipFill>
         <p:spPr>
           <a:xfrm>
-            <a:off x="4471416" y="1933956"/>
-            <a:ext cx="566928" cy="566928"/>
+            <a:off x="4471416" y="1860804"/>
+            <a:ext cx="530352" cy="530352"/>
           </a:xfrm>
           <a:prstGeom prst="rect">
             <a:avLst/>
@@ -2714,14 +2684,14 @@
       </p:pic>
       <p:sp>
         <p:nvSpPr>
-          <p:cNvPr id="29" name="Text 22"/>
-          <p:cNvSpPr/>
-          <p:nvPr/>
-        </p:nvSpPr>
-        <p:spPr>
-          <a:xfrm>
-            <a:off x="5166360" y="1892808"/>
-            <a:ext cx="2880360" cy="310896"/>
+          <p:cNvPr id="28" name="Text 22"/>
+          <p:cNvSpPr/>
+          <p:nvPr/>
+        </p:nvSpPr>
+        <p:spPr>
+          <a:xfrm>
+            <a:off x="5166360" y="1801368"/>
+            <a:ext cx="2880360" cy="292608"/>
           </a:xfrm>
           <a:prstGeom prst="rect">
             <a:avLst/>
@@ -2753,13 +2723,13 @@
       </p:sp>
       <p:sp>
         <p:nvSpPr>
-          <p:cNvPr id="30" name="Text 23"/>
-          <p:cNvSpPr/>
-          <p:nvPr/>
-        </p:nvSpPr>
-        <p:spPr>
-          <a:xfrm>
-            <a:off x="5166360" y="2185416"/>
+          <p:cNvPr id="29" name="Text 23"/>
+          <p:cNvSpPr/>
+          <p:nvPr/>
+        </p:nvSpPr>
+        <p:spPr>
+          <a:xfrm>
+            <a:off x="5166360" y="2093976"/>
             <a:ext cx="2880360" cy="393192"/>
           </a:xfrm>
           <a:prstGeom prst="rect">
@@ -2778,7 +2748,7 @@
             <a:r>
               <a:rPr lang="en-US" sz="900" dirty="0">
                 <a:solidFill>
-                  <a:srgbClr val="A9B3B6"/>
+                  <a:srgbClr val="545659"/>
                 </a:solidFill>
                 <a:latin typeface="Inter" pitchFamily="34" charset="0"/>
                 <a:ea typeface="Inter" pitchFamily="34" charset="-122"/>
@@ -2792,13 +2762,13 @@
       </p:sp>
       <p:sp>
         <p:nvSpPr>
-          <p:cNvPr id="31" name="Shape 24"/>
-          <p:cNvSpPr/>
-          <p:nvPr/>
-        </p:nvSpPr>
-        <p:spPr>
-          <a:xfrm>
-            <a:off x="4251960" y="2926080"/>
+          <p:cNvPr id="30" name="Shape 24"/>
+          <p:cNvSpPr/>
+          <p:nvPr/>
+        </p:nvSpPr>
+        <p:spPr>
+          <a:xfrm>
+            <a:off x="4251960" y="2834640"/>
             <a:ext cx="3886200" cy="868680"/>
           </a:xfrm>
           <a:prstGeom prst="roundRect">
@@ -2819,13 +2789,13 @@
       </p:sp>
       <p:sp>
         <p:nvSpPr>
-          <p:cNvPr id="32" name="Shape 25"/>
-          <p:cNvSpPr/>
-          <p:nvPr/>
-        </p:nvSpPr>
-        <p:spPr>
-          <a:xfrm>
-            <a:off x="4251960" y="2926080"/>
+          <p:cNvPr id="31" name="Shape 25"/>
+          <p:cNvSpPr/>
+          <p:nvPr/>
+        </p:nvSpPr>
+        <p:spPr>
+          <a:xfrm>
+            <a:off x="4251960" y="2834640"/>
             <a:ext cx="91440" cy="868680"/>
           </a:xfrm>
           <a:prstGeom prst="roundRect">
@@ -2841,22 +2811,22 @@
       </p:sp>
       <p:pic>
         <p:nvPicPr>
-          <p:cNvPr id="33" name="Image 5" descr="deploy/assets/icons/exporters.png">    </p:cNvPr>
+          <p:cNvPr id="32" name="Image 4" descr="deploy/assets/icons/exporters.png">    </p:cNvPr>
           <p:cNvPicPr>
             <a:picLocks noChangeAspect="1"/>
           </p:cNvPicPr>
           <p:nvPr/>
         </p:nvPicPr>
         <p:blipFill>
-          <a:blip r:embed="rId7"/>
+          <a:blip r:embed="rId5"/>
           <a:stretch>
             <a:fillRect/>
           </a:stretch>
         </p:blipFill>
         <p:spPr>
           <a:xfrm>
-            <a:off x="4471416" y="3076956"/>
-            <a:ext cx="566928" cy="566928"/>
+            <a:off x="4471416" y="3003804"/>
+            <a:ext cx="530352" cy="530352"/>
           </a:xfrm>
           <a:prstGeom prst="rect">
             <a:avLst/>
@@ -2865,14 +2835,14 @@
       </p:pic>
       <p:sp>
         <p:nvSpPr>
-          <p:cNvPr id="34" name="Text 26"/>
-          <p:cNvSpPr/>
-          <p:nvPr/>
-        </p:nvSpPr>
-        <p:spPr>
-          <a:xfrm>
-            <a:off x="5166360" y="3035808"/>
-            <a:ext cx="2880360" cy="310896"/>
+          <p:cNvPr id="33" name="Text 26"/>
+          <p:cNvSpPr/>
+          <p:nvPr/>
+        </p:nvSpPr>
+        <p:spPr>
+          <a:xfrm>
+            <a:off x="5166360" y="2944368"/>
+            <a:ext cx="2880360" cy="292608"/>
           </a:xfrm>
           <a:prstGeom prst="rect">
             <a:avLst/>
@@ -2904,13 +2874,13 @@
       </p:sp>
       <p:sp>
         <p:nvSpPr>
-          <p:cNvPr id="35" name="Text 27"/>
-          <p:cNvSpPr/>
-          <p:nvPr/>
-        </p:nvSpPr>
-        <p:spPr>
-          <a:xfrm>
-            <a:off x="5166360" y="3328416"/>
+          <p:cNvPr id="34" name="Text 27"/>
+          <p:cNvSpPr/>
+          <p:nvPr/>
+        </p:nvSpPr>
+        <p:spPr>
+          <a:xfrm>
+            <a:off x="5166360" y="3236976"/>
             <a:ext cx="2880360" cy="393192"/>
           </a:xfrm>
           <a:prstGeom prst="rect">
@@ -2929,7 +2899,7 @@
             <a:r>
               <a:rPr lang="en-US" sz="900" dirty="0">
                 <a:solidFill>
-                  <a:srgbClr val="A9B3B6"/>
+                  <a:srgbClr val="545659"/>
                 </a:solidFill>
                 <a:latin typeface="Inter" pitchFamily="34" charset="0"/>
                 <a:ea typeface="Inter" pitchFamily="34" charset="-122"/>
@@ -2943,13 +2913,13 @@
       </p:sp>
       <p:sp>
         <p:nvSpPr>
-          <p:cNvPr id="36" name="Shape 28"/>
-          <p:cNvSpPr/>
-          <p:nvPr/>
-        </p:nvSpPr>
-        <p:spPr>
-          <a:xfrm>
-            <a:off x="4251960" y="4069080"/>
+          <p:cNvPr id="35" name="Shape 28"/>
+          <p:cNvSpPr/>
+          <p:nvPr/>
+        </p:nvSpPr>
+        <p:spPr>
+          <a:xfrm>
+            <a:off x="4251960" y="3977640"/>
             <a:ext cx="3886200" cy="868680"/>
           </a:xfrm>
           <a:prstGeom prst="roundRect">
@@ -2970,13 +2940,13 @@
       </p:sp>
       <p:sp>
         <p:nvSpPr>
-          <p:cNvPr id="37" name="Shape 29"/>
-          <p:cNvSpPr/>
-          <p:nvPr/>
-        </p:nvSpPr>
-        <p:spPr>
-          <a:xfrm>
-            <a:off x="4251960" y="4069080"/>
+          <p:cNvPr id="36" name="Shape 29"/>
+          <p:cNvSpPr/>
+          <p:nvPr/>
+        </p:nvSpPr>
+        <p:spPr>
+          <a:xfrm>
+            <a:off x="4251960" y="3977640"/>
             <a:ext cx="91440" cy="868680"/>
           </a:xfrm>
           <a:prstGeom prst="roundRect">
@@ -2992,22 +2962,22 @@
       </p:sp>
       <p:pic>
         <p:nvPicPr>
-          <p:cNvPr id="38" name="Image 6" descr="deploy/assets/icons/extractor.png">    </p:cNvPr>
+          <p:cNvPr id="37" name="Image 5" descr="deploy/assets/icons/extractor.png">    </p:cNvPr>
           <p:cNvPicPr>
             <a:picLocks noChangeAspect="1"/>
           </p:cNvPicPr>
           <p:nvPr/>
         </p:nvPicPr>
         <p:blipFill>
-          <a:blip r:embed="rId8"/>
+          <a:blip r:embed="rId6"/>
           <a:stretch>
             <a:fillRect/>
           </a:stretch>
         </p:blipFill>
         <p:spPr>
           <a:xfrm>
-            <a:off x="4471416" y="4219956"/>
-            <a:ext cx="566928" cy="566928"/>
+            <a:off x="4471416" y="4146804"/>
+            <a:ext cx="530352" cy="530352"/>
           </a:xfrm>
           <a:prstGeom prst="rect">
             <a:avLst/>
@@ -3016,14 +2986,14 @@
       </p:pic>
       <p:sp>
         <p:nvSpPr>
-          <p:cNvPr id="39" name="Text 30"/>
-          <p:cNvSpPr/>
-          <p:nvPr/>
-        </p:nvSpPr>
-        <p:spPr>
-          <a:xfrm>
-            <a:off x="5166360" y="4178808"/>
-            <a:ext cx="2880360" cy="310896"/>
+          <p:cNvPr id="38" name="Text 30"/>
+          <p:cNvSpPr/>
+          <p:nvPr/>
+        </p:nvSpPr>
+        <p:spPr>
+          <a:xfrm>
+            <a:off x="5166360" y="4087368"/>
+            <a:ext cx="2880360" cy="292608"/>
           </a:xfrm>
           <a:prstGeom prst="rect">
             <a:avLst/>
@@ -3055,13 +3025,13 @@
       </p:sp>
       <p:sp>
         <p:nvSpPr>
-          <p:cNvPr id="40" name="Text 31"/>
-          <p:cNvSpPr/>
-          <p:nvPr/>
-        </p:nvSpPr>
-        <p:spPr>
-          <a:xfrm>
-            <a:off x="5166360" y="4471416"/>
+          <p:cNvPr id="39" name="Text 31"/>
+          <p:cNvSpPr/>
+          <p:nvPr/>
+        </p:nvSpPr>
+        <p:spPr>
+          <a:xfrm>
+            <a:off x="5166360" y="4379976"/>
             <a:ext cx="2880360" cy="393192"/>
           </a:xfrm>
           <a:prstGeom prst="rect">
@@ -3080,7 +3050,7 @@
             <a:r>
               <a:rPr lang="en-US" sz="900" dirty="0">
                 <a:solidFill>
-                  <a:srgbClr val="A9B3B6"/>
+                  <a:srgbClr val="545659"/>
                 </a:solidFill>
                 <a:latin typeface="Inter" pitchFamily="34" charset="0"/>
                 <a:ea typeface="Inter" pitchFamily="34" charset="-122"/>
@@ -3094,13 +3064,13 @@
       </p:sp>
       <p:sp>
         <p:nvSpPr>
-          <p:cNvPr id="41" name="Shape 32"/>
-          <p:cNvSpPr/>
-          <p:nvPr/>
-        </p:nvSpPr>
-        <p:spPr>
-          <a:xfrm>
-            <a:off x="8686800" y="1783080"/>
+          <p:cNvPr id="40" name="Shape 32"/>
+          <p:cNvSpPr/>
+          <p:nvPr/>
+        </p:nvSpPr>
+        <p:spPr>
+          <a:xfrm>
+            <a:off x="8686800" y="1691640"/>
             <a:ext cx="2880360" cy="868680"/>
           </a:xfrm>
           <a:prstGeom prst="roundRect">
@@ -3121,13 +3091,13 @@
       </p:sp>
       <p:sp>
         <p:nvSpPr>
-          <p:cNvPr id="42" name="Shape 33"/>
-          <p:cNvSpPr/>
-          <p:nvPr/>
-        </p:nvSpPr>
-        <p:spPr>
-          <a:xfrm>
-            <a:off x="8686800" y="1783080"/>
+          <p:cNvPr id="41" name="Shape 33"/>
+          <p:cNvSpPr/>
+          <p:nvPr/>
+        </p:nvSpPr>
+        <p:spPr>
+          <a:xfrm>
+            <a:off x="8686800" y="1691640"/>
             <a:ext cx="91440" cy="868680"/>
           </a:xfrm>
           <a:prstGeom prst="roundRect">
@@ -3143,22 +3113,22 @@
       </p:sp>
       <p:pic>
         <p:nvPicPr>
-          <p:cNvPr id="43" name="Image 7" descr="deploy/assets/icons/prometheus.png">    </p:cNvPr>
+          <p:cNvPr id="42" name="Image 6" descr="deploy/assets/icons/prometheus.png">    </p:cNvPr>
           <p:cNvPicPr>
             <a:picLocks noChangeAspect="1"/>
           </p:cNvPicPr>
           <p:nvPr/>
         </p:nvPicPr>
         <p:blipFill>
-          <a:blip r:embed="rId9"/>
+          <a:blip r:embed="rId7"/>
           <a:stretch>
             <a:fillRect/>
           </a:stretch>
         </p:blipFill>
         <p:spPr>
           <a:xfrm>
-            <a:off x="8906256" y="1933956"/>
-            <a:ext cx="566928" cy="566928"/>
+            <a:off x="8906256" y="1860804"/>
+            <a:ext cx="530352" cy="530352"/>
           </a:xfrm>
           <a:prstGeom prst="rect">
             <a:avLst/>
@@ -3167,14 +3137,14 @@
       </p:pic>
       <p:sp>
         <p:nvSpPr>
-          <p:cNvPr id="44" name="Text 34"/>
-          <p:cNvSpPr/>
-          <p:nvPr/>
-        </p:nvSpPr>
-        <p:spPr>
-          <a:xfrm>
-            <a:off x="9601200" y="1892808"/>
-            <a:ext cx="1874520" cy="310896"/>
+          <p:cNvPr id="43" name="Text 34"/>
+          <p:cNvSpPr/>
+          <p:nvPr/>
+        </p:nvSpPr>
+        <p:spPr>
+          <a:xfrm>
+            <a:off x="9601200" y="1801368"/>
+            <a:ext cx="1874520" cy="292608"/>
           </a:xfrm>
           <a:prstGeom prst="rect">
             <a:avLst/>
@@ -3206,13 +3176,13 @@
       </p:sp>
       <p:sp>
         <p:nvSpPr>
-          <p:cNvPr id="45" name="Text 35"/>
-          <p:cNvSpPr/>
-          <p:nvPr/>
-        </p:nvSpPr>
-        <p:spPr>
-          <a:xfrm>
-            <a:off x="9601200" y="2185416"/>
+          <p:cNvPr id="44" name="Text 35"/>
+          <p:cNvSpPr/>
+          <p:nvPr/>
+        </p:nvSpPr>
+        <p:spPr>
+          <a:xfrm>
+            <a:off x="9601200" y="2093976"/>
             <a:ext cx="1874520" cy="393192"/>
           </a:xfrm>
           <a:prstGeom prst="rect">
@@ -3231,7 +3201,7 @@
             <a:r>
               <a:rPr lang="en-US" sz="900" dirty="0">
                 <a:solidFill>
-                  <a:srgbClr val="A9B3B6"/>
+                  <a:srgbClr val="545659"/>
                 </a:solidFill>
                 <a:latin typeface="Inter" pitchFamily="34" charset="0"/>
                 <a:ea typeface="Inter" pitchFamily="34" charset="-122"/>
@@ -3245,13 +3215,13 @@
       </p:sp>
       <p:sp>
         <p:nvSpPr>
-          <p:cNvPr id="46" name="Shape 36"/>
-          <p:cNvSpPr/>
-          <p:nvPr/>
-        </p:nvSpPr>
-        <p:spPr>
-          <a:xfrm>
-            <a:off x="8686800" y="2926080"/>
+          <p:cNvPr id="45" name="Shape 36"/>
+          <p:cNvSpPr/>
+          <p:nvPr/>
+        </p:nvSpPr>
+        <p:spPr>
+          <a:xfrm>
+            <a:off x="8686800" y="2834640"/>
             <a:ext cx="2880360" cy="868680"/>
           </a:xfrm>
           <a:prstGeom prst="roundRect">
@@ -3272,13 +3242,13 @@
       </p:sp>
       <p:sp>
         <p:nvSpPr>
-          <p:cNvPr id="47" name="Shape 37"/>
-          <p:cNvSpPr/>
-          <p:nvPr/>
-        </p:nvSpPr>
-        <p:spPr>
-          <a:xfrm>
-            <a:off x="8686800" y="2926080"/>
+          <p:cNvPr id="46" name="Shape 37"/>
+          <p:cNvSpPr/>
+          <p:nvPr/>
+        </p:nvSpPr>
+        <p:spPr>
+          <a:xfrm>
+            <a:off x="8686800" y="2834640"/>
             <a:ext cx="91440" cy="868680"/>
           </a:xfrm>
           <a:prstGeom prst="roundRect">
@@ -3294,22 +3264,22 @@
       </p:sp>
       <p:pic>
         <p:nvPicPr>
-          <p:cNvPr id="48" name="Image 8" descr="deploy/assets/icons/grafana.png">    </p:cNvPr>
+          <p:cNvPr id="47" name="Image 7" descr="deploy/assets/icons/grafana.png">    </p:cNvPr>
           <p:cNvPicPr>
             <a:picLocks noChangeAspect="1"/>
           </p:cNvPicPr>
           <p:nvPr/>
         </p:nvPicPr>
         <p:blipFill>
-          <a:blip r:embed="rId10"/>
+          <a:blip r:embed="rId8"/>
           <a:stretch>
             <a:fillRect/>
           </a:stretch>
         </p:blipFill>
         <p:spPr>
           <a:xfrm>
-            <a:off x="8906256" y="3076956"/>
-            <a:ext cx="566928" cy="566928"/>
+            <a:off x="8906256" y="3003804"/>
+            <a:ext cx="530352" cy="530352"/>
           </a:xfrm>
           <a:prstGeom prst="rect">
             <a:avLst/>
@@ -3318,14 +3288,14 @@
       </p:pic>
       <p:sp>
         <p:nvSpPr>
-          <p:cNvPr id="49" name="Text 38"/>
-          <p:cNvSpPr/>
-          <p:nvPr/>
-        </p:nvSpPr>
-        <p:spPr>
-          <a:xfrm>
-            <a:off x="9601200" y="3035808"/>
-            <a:ext cx="1874520" cy="310896"/>
+          <p:cNvPr id="48" name="Text 38"/>
+          <p:cNvSpPr/>
+          <p:nvPr/>
+        </p:nvSpPr>
+        <p:spPr>
+          <a:xfrm>
+            <a:off x="9601200" y="2944368"/>
+            <a:ext cx="1874520" cy="292608"/>
           </a:xfrm>
           <a:prstGeom prst="rect">
             <a:avLst/>
@@ -3357,13 +3327,13 @@
       </p:sp>
       <p:sp>
         <p:nvSpPr>
-          <p:cNvPr id="50" name="Text 39"/>
-          <p:cNvSpPr/>
-          <p:nvPr/>
-        </p:nvSpPr>
-        <p:spPr>
-          <a:xfrm>
-            <a:off x="9601200" y="3328416"/>
+          <p:cNvPr id="49" name="Text 39"/>
+          <p:cNvSpPr/>
+          <p:nvPr/>
+        </p:nvSpPr>
+        <p:spPr>
+          <a:xfrm>
+            <a:off x="9601200" y="3236976"/>
             <a:ext cx="1874520" cy="393192"/>
           </a:xfrm>
           <a:prstGeom prst="rect">
@@ -3382,7 +3352,7 @@
             <a:r>
               <a:rPr lang="en-US" sz="900" dirty="0">
                 <a:solidFill>
-                  <a:srgbClr val="A9B3B6"/>
+                  <a:srgbClr val="545659"/>
                 </a:solidFill>
                 <a:latin typeface="Inter" pitchFamily="34" charset="0"/>
                 <a:ea typeface="Inter" pitchFamily="34" charset="-122"/>
@@ -3396,13 +3366,13 @@
       </p:sp>
       <p:sp>
         <p:nvSpPr>
-          <p:cNvPr id="51" name="Shape 40"/>
-          <p:cNvSpPr/>
-          <p:nvPr/>
-        </p:nvSpPr>
-        <p:spPr>
-          <a:xfrm>
-            <a:off x="8686800" y="4069080"/>
+          <p:cNvPr id="50" name="Shape 40"/>
+          <p:cNvSpPr/>
+          <p:nvPr/>
+        </p:nvSpPr>
+        <p:spPr>
+          <a:xfrm>
+            <a:off x="8686800" y="3977640"/>
             <a:ext cx="2880360" cy="868680"/>
           </a:xfrm>
           <a:prstGeom prst="roundRect">
@@ -3423,13 +3393,13 @@
       </p:sp>
       <p:sp>
         <p:nvSpPr>
-          <p:cNvPr id="52" name="Shape 41"/>
-          <p:cNvSpPr/>
-          <p:nvPr/>
-        </p:nvSpPr>
-        <p:spPr>
-          <a:xfrm>
-            <a:off x="8686800" y="4069080"/>
+          <p:cNvPr id="51" name="Shape 41"/>
+          <p:cNvSpPr/>
+          <p:nvPr/>
+        </p:nvSpPr>
+        <p:spPr>
+          <a:xfrm>
+            <a:off x="8686800" y="3977640"/>
             <a:ext cx="91440" cy="868680"/>
           </a:xfrm>
           <a:prstGeom prst="roundRect">
@@ -3445,22 +3415,22 @@
       </p:sp>
       <p:pic>
         <p:nvPicPr>
-          <p:cNvPr id="53" name="Image 9" descr="deploy/assets/icons/qlik-app.png">    </p:cNvPr>
+          <p:cNvPr id="52" name="Image 8" descr="deploy/assets/icons/qlik-app.png">    </p:cNvPr>
           <p:cNvPicPr>
             <a:picLocks noChangeAspect="1"/>
           </p:cNvPicPr>
           <p:nvPr/>
         </p:nvPicPr>
         <p:blipFill>
-          <a:blip r:embed="rId11"/>
+          <a:blip r:embed="rId9"/>
           <a:stretch>
             <a:fillRect/>
           </a:stretch>
         </p:blipFill>
         <p:spPr>
           <a:xfrm>
-            <a:off x="8906256" y="4219956"/>
-            <a:ext cx="566928" cy="566928"/>
+            <a:off x="8906256" y="4146804"/>
+            <a:ext cx="530352" cy="530352"/>
           </a:xfrm>
           <a:prstGeom prst="rect">
             <a:avLst/>
@@ -3469,14 +3439,14 @@
       </p:pic>
       <p:sp>
         <p:nvSpPr>
-          <p:cNvPr id="54" name="Text 42"/>
-          <p:cNvSpPr/>
-          <p:nvPr/>
-        </p:nvSpPr>
-        <p:spPr>
-          <a:xfrm>
-            <a:off x="9601200" y="4178808"/>
-            <a:ext cx="1874520" cy="310896"/>
+          <p:cNvPr id="53" name="Text 42"/>
+          <p:cNvSpPr/>
+          <p:nvPr/>
+        </p:nvSpPr>
+        <p:spPr>
+          <a:xfrm>
+            <a:off x="9601200" y="4087368"/>
+            <a:ext cx="1874520" cy="292608"/>
           </a:xfrm>
           <a:prstGeom prst="rect">
             <a:avLst/>
@@ -3508,13 +3478,13 @@
       </p:sp>
       <p:sp>
         <p:nvSpPr>
-          <p:cNvPr id="55" name="Text 43"/>
-          <p:cNvSpPr/>
-          <p:nvPr/>
-        </p:nvSpPr>
-        <p:spPr>
-          <a:xfrm>
-            <a:off x="9601200" y="4471416"/>
+          <p:cNvPr id="54" name="Text 43"/>
+          <p:cNvSpPr/>
+          <p:nvPr/>
+        </p:nvSpPr>
+        <p:spPr>
+          <a:xfrm>
+            <a:off x="9601200" y="4379976"/>
             <a:ext cx="1874520" cy="393192"/>
           </a:xfrm>
           <a:prstGeom prst="rect">
@@ -3533,7 +3503,7 @@
             <a:r>
               <a:rPr lang="en-US" sz="900" dirty="0">
                 <a:solidFill>
-                  <a:srgbClr val="A9B3B6"/>
+                  <a:srgbClr val="545659"/>
                 </a:solidFill>
                 <a:latin typeface="Inter" pitchFamily="34" charset="0"/>
                 <a:ea typeface="Inter" pitchFamily="34" charset="-122"/>
@@ -3547,13 +3517,13 @@
       </p:sp>
       <p:sp>
         <p:nvSpPr>
-          <p:cNvPr id="56" name="Shape 44"/>
-          <p:cNvSpPr/>
-          <p:nvPr/>
-        </p:nvSpPr>
-        <p:spPr>
-          <a:xfrm>
-            <a:off x="3703320" y="2217420"/>
+          <p:cNvPr id="55" name="Shape 44"/>
+          <p:cNvSpPr/>
+          <p:nvPr/>
+        </p:nvSpPr>
+        <p:spPr>
+          <a:xfrm>
+            <a:off x="3703320" y="2125980"/>
             <a:ext cx="548640" cy="0"/>
           </a:xfrm>
           <a:prstGeom prst="line">
@@ -3571,13 +3541,13 @@
       </p:sp>
       <p:sp>
         <p:nvSpPr>
-          <p:cNvPr id="57" name="Shape 45"/>
-          <p:cNvSpPr/>
-          <p:nvPr/>
-        </p:nvSpPr>
-        <p:spPr>
-          <a:xfrm>
-            <a:off x="3703320" y="3360420"/>
+          <p:cNvPr id="56" name="Shape 45"/>
+          <p:cNvSpPr/>
+          <p:nvPr/>
+        </p:nvSpPr>
+        <p:spPr>
+          <a:xfrm>
+            <a:off x="3703320" y="3268980"/>
             <a:ext cx="548640" cy="1143000"/>
           </a:xfrm>
           <a:prstGeom prst="line">
@@ -3595,13 +3565,13 @@
       </p:sp>
       <p:sp>
         <p:nvSpPr>
-          <p:cNvPr id="58" name="Shape 46"/>
-          <p:cNvSpPr/>
-          <p:nvPr/>
-        </p:nvSpPr>
-        <p:spPr>
-          <a:xfrm>
-            <a:off x="3703320" y="4503420"/>
+          <p:cNvPr id="57" name="Shape 46"/>
+          <p:cNvSpPr/>
+          <p:nvPr/>
+        </p:nvSpPr>
+        <p:spPr>
+          <a:xfrm>
+            <a:off x="3703320" y="4411980"/>
             <a:ext cx="548640" cy="0"/>
           </a:xfrm>
           <a:prstGeom prst="line">
@@ -3619,13 +3589,13 @@
       </p:sp>
       <p:sp>
         <p:nvSpPr>
-          <p:cNvPr id="59" name="Shape 47"/>
-          <p:cNvSpPr/>
-          <p:nvPr/>
-        </p:nvSpPr>
-        <p:spPr>
-          <a:xfrm>
-            <a:off x="8138160" y="2217420"/>
+          <p:cNvPr id="58" name="Shape 47"/>
+          <p:cNvSpPr/>
+          <p:nvPr/>
+        </p:nvSpPr>
+        <p:spPr>
+          <a:xfrm>
+            <a:off x="8138160" y="2125980"/>
             <a:ext cx="548640" cy="0"/>
           </a:xfrm>
           <a:prstGeom prst="line">
@@ -3643,13 +3613,13 @@
       </p:sp>
       <p:sp>
         <p:nvSpPr>
-          <p:cNvPr id="60" name="Shape 48"/>
-          <p:cNvSpPr/>
-          <p:nvPr/>
-        </p:nvSpPr>
-        <p:spPr>
-          <a:xfrm>
-            <a:off x="8138160" y="3360420"/>
+          <p:cNvPr id="59" name="Shape 48"/>
+          <p:cNvSpPr/>
+          <p:nvPr/>
+        </p:nvSpPr>
+        <p:spPr>
+          <a:xfrm>
+            <a:off x="8138160" y="3268980"/>
             <a:ext cx="548640" cy="-1143000"/>
           </a:xfrm>
           <a:prstGeom prst="line">
@@ -3667,13 +3637,13 @@
       </p:sp>
       <p:sp>
         <p:nvSpPr>
-          <p:cNvPr id="61" name="Shape 49"/>
-          <p:cNvSpPr/>
-          <p:nvPr/>
-        </p:nvSpPr>
-        <p:spPr>
-          <a:xfrm>
-            <a:off x="8138160" y="4503420"/>
+          <p:cNvPr id="60" name="Shape 49"/>
+          <p:cNvSpPr/>
+          <p:nvPr/>
+        </p:nvSpPr>
+        <p:spPr>
+          <a:xfrm>
+            <a:off x="8138160" y="4411980"/>
             <a:ext cx="548640" cy="-2286000"/>
           </a:xfrm>
           <a:prstGeom prst="line">
@@ -3691,38 +3661,434 @@
       </p:sp>
       <p:sp>
         <p:nvSpPr>
-          <p:cNvPr id="62" name="Shape 50"/>
-          <p:cNvSpPr/>
-          <p:nvPr/>
-        </p:nvSpPr>
-        <p:spPr>
-          <a:xfrm>
-            <a:off x="10122408" y="2628900"/>
-            <a:ext cx="0" cy="731520"/>
-          </a:xfrm>
-          <a:prstGeom prst="line">
-            <a:avLst/>
-          </a:prstGeom>
-          <a:noFill/>
-          <a:ln w="22225">
+          <p:cNvPr id="61" name="Text 50"/>
+          <p:cNvSpPr/>
+          <p:nvPr/>
+        </p:nvSpPr>
+        <p:spPr>
+          <a:xfrm>
+            <a:off x="457200" y="5321808"/>
+            <a:ext cx="11247120" cy="256032"/>
+          </a:xfrm>
+          <a:prstGeom prst="rect">
+            <a:avLst/>
+          </a:prstGeom>
+          <a:noFill/>
+          <a:ln/>
+        </p:spPr>
+        <p:txBody>
+          <a:bodyPr wrap="square" rtlCol="0" anchor="ctr"/>
+          <a:lstStyle/>
+          <a:p>
+            <a:pPr indent="0" marL="0">
+              <a:buNone/>
+            </a:pPr>
+            <a:r>
+              <a:rPr lang="en-US" sz="1100" b="1" spc="100" kern="0" dirty="0">
+                <a:solidFill>
+                  <a:srgbClr val="009845"/>
+                </a:solidFill>
+                <a:latin typeface="Inter" pitchFamily="34" charset="0"/>
+                <a:ea typeface="Inter" pitchFamily="34" charset="-122"/>
+                <a:cs typeface="Inter" pitchFamily="34" charset="-120"/>
+              </a:rPr>
+              <a:t>TELEMETRY EXPORT · OPENTELEMETRY COLLECTOR</a:t>
+            </a:r>
+            <a:endParaRPr lang="en-US" sz="1100" dirty="0"/>
+          </a:p>
+        </p:txBody>
+      </p:sp>
+      <p:sp>
+        <p:nvSpPr>
+          <p:cNvPr id="62" name="Shape 51"/>
+          <p:cNvSpPr/>
+          <p:nvPr/>
+        </p:nvSpPr>
+        <p:spPr>
+          <a:xfrm>
+            <a:off x="594360" y="5623560"/>
+            <a:ext cx="3840480" cy="841248"/>
+          </a:xfrm>
+          <a:prstGeom prst="roundRect">
+            <a:avLst>
+              <a:gd name="adj" fmla="val 7609"/>
+            </a:avLst>
+          </a:prstGeom>
+          <a:solidFill>
+            <a:srgbClr val="FFFFFF"/>
+          </a:solidFill>
+          <a:ln w="15875">
+            <a:solidFill>
+              <a:srgbClr val="006580"/>
+            </a:solidFill>
+            <a:prstDash val="solid"/>
+          </a:ln>
+        </p:spPr>
+      </p:sp>
+      <p:sp>
+        <p:nvSpPr>
+          <p:cNvPr id="63" name="Shape 52"/>
+          <p:cNvSpPr/>
+          <p:nvPr/>
+        </p:nvSpPr>
+        <p:spPr>
+          <a:xfrm>
+            <a:off x="594360" y="5623560"/>
+            <a:ext cx="91440" cy="841248"/>
+          </a:xfrm>
+          <a:prstGeom prst="roundRect">
+            <a:avLst>
+              <a:gd name="adj" fmla="val 70000"/>
+            </a:avLst>
+          </a:prstGeom>
+          <a:solidFill>
+            <a:srgbClr val="006580"/>
+          </a:solidFill>
+          <a:ln/>
+        </p:spPr>
+      </p:sp>
+      <p:sp>
+        <p:nvSpPr>
+          <p:cNvPr id="64" name="Text 53"/>
+          <p:cNvSpPr/>
+          <p:nvPr/>
+        </p:nvSpPr>
+        <p:spPr>
+          <a:xfrm>
+            <a:off x="850392" y="5733288"/>
+            <a:ext cx="3493008" cy="292608"/>
+          </a:xfrm>
+          <a:prstGeom prst="rect">
+            <a:avLst/>
+          </a:prstGeom>
+          <a:noFill/>
+          <a:ln/>
+        </p:spPr>
+        <p:txBody>
+          <a:bodyPr wrap="square" rtlCol="0" anchor="ctr"/>
+          <a:lstStyle/>
+          <a:p>
+            <a:pPr indent="0" marL="0">
+              <a:buNone/>
+            </a:pPr>
+            <a:r>
+              <a:rPr lang="en-US" sz="1200" b="1" dirty="0">
+                <a:solidFill>
+                  <a:srgbClr val="2D3543"/>
+                </a:solidFill>
+                <a:latin typeface="Inter" pitchFamily="34" charset="0"/>
+                <a:ea typeface="Inter" pitchFamily="34" charset="-122"/>
+                <a:cs typeface="Inter" pitchFamily="34" charset="-120"/>
+              </a:rPr>
+              <a:t>OpenTelemetry Collector</a:t>
+            </a:r>
+            <a:endParaRPr lang="en-US" sz="1200" dirty="0"/>
+          </a:p>
+        </p:txBody>
+      </p:sp>
+      <p:sp>
+        <p:nvSpPr>
+          <p:cNvPr id="65" name="Text 54"/>
+          <p:cNvSpPr/>
+          <p:nvPr/>
+        </p:nvSpPr>
+        <p:spPr>
+          <a:xfrm>
+            <a:off x="850392" y="6025896"/>
+            <a:ext cx="3493008" cy="365760"/>
+          </a:xfrm>
+          <a:prstGeom prst="rect">
+            <a:avLst/>
+          </a:prstGeom>
+          <a:noFill/>
+          <a:ln/>
+        </p:spPr>
+        <p:txBody>
+          <a:bodyPr wrap="square" rtlCol="0" anchor="t"/>
+          <a:lstStyle/>
+          <a:p>
+            <a:pPr indent="0" marL="0">
+              <a:buNone/>
+            </a:pPr>
+            <a:r>
+              <a:rPr lang="en-US" sz="900" dirty="0">
+                <a:solidFill>
+                  <a:srgbClr val="545659"/>
+                </a:solidFill>
+                <a:latin typeface="Inter" pitchFamily="34" charset="0"/>
+                <a:ea typeface="Inter" pitchFamily="34" charset="-122"/>
+                <a:cs typeface="Inter" pitchFamily="34" charset="-120"/>
+              </a:rPr>
+              <a:t>OTLP receiver · scrapes every /metrics · batch + route</a:t>
+            </a:r>
+            <a:endParaRPr lang="en-US" sz="900" dirty="0"/>
+          </a:p>
+        </p:txBody>
+      </p:sp>
+      <p:sp>
+        <p:nvSpPr>
+          <p:cNvPr id="66" name="Shape 55"/>
+          <p:cNvSpPr/>
+          <p:nvPr/>
+        </p:nvSpPr>
+        <p:spPr>
+          <a:xfrm>
+            <a:off x="4937760" y="5623560"/>
+            <a:ext cx="3200400" cy="841248"/>
+          </a:xfrm>
+          <a:prstGeom prst="roundRect">
+            <a:avLst>
+              <a:gd name="adj" fmla="val 7609"/>
+            </a:avLst>
+          </a:prstGeom>
+          <a:solidFill>
+            <a:srgbClr val="FFFFFF"/>
+          </a:solidFill>
+          <a:ln w="15875">
+            <a:solidFill>
+              <a:srgbClr val="93579C"/>
+            </a:solidFill>
+            <a:prstDash val="solid"/>
+          </a:ln>
+        </p:spPr>
+      </p:sp>
+      <p:sp>
+        <p:nvSpPr>
+          <p:cNvPr id="67" name="Shape 56"/>
+          <p:cNvSpPr/>
+          <p:nvPr/>
+        </p:nvSpPr>
+        <p:spPr>
+          <a:xfrm>
+            <a:off x="4937760" y="5623560"/>
+            <a:ext cx="91440" cy="841248"/>
+          </a:xfrm>
+          <a:prstGeom prst="roundRect">
+            <a:avLst>
+              <a:gd name="adj" fmla="val 70000"/>
+            </a:avLst>
+          </a:prstGeom>
+          <a:solidFill>
+            <a:srgbClr val="93579C"/>
+          </a:solidFill>
+          <a:ln/>
+        </p:spPr>
+      </p:sp>
+      <p:sp>
+        <p:nvSpPr>
+          <p:cNvPr id="68" name="Text 57"/>
+          <p:cNvSpPr/>
+          <p:nvPr/>
+        </p:nvSpPr>
+        <p:spPr>
+          <a:xfrm>
+            <a:off x="5193792" y="5733288"/>
+            <a:ext cx="2852928" cy="292608"/>
+          </a:xfrm>
+          <a:prstGeom prst="rect">
+            <a:avLst/>
+          </a:prstGeom>
+          <a:noFill/>
+          <a:ln/>
+        </p:spPr>
+        <p:txBody>
+          <a:bodyPr wrap="square" rtlCol="0" anchor="ctr"/>
+          <a:lstStyle/>
+          <a:p>
+            <a:pPr indent="0" marL="0">
+              <a:buNone/>
+            </a:pPr>
+            <a:r>
+              <a:rPr lang="en-US" sz="1200" b="1" dirty="0">
+                <a:solidFill>
+                  <a:srgbClr val="2D3543"/>
+                </a:solidFill>
+                <a:latin typeface="Inter" pitchFamily="34" charset="0"/>
+                <a:ea typeface="Inter" pitchFamily="34" charset="-122"/>
+                <a:cs typeface="Inter" pitchFamily="34" charset="-120"/>
+              </a:rPr>
+              <a:t>Datadog</a:t>
+            </a:r>
+            <a:endParaRPr lang="en-US" sz="1200" dirty="0"/>
+          </a:p>
+        </p:txBody>
+      </p:sp>
+      <p:sp>
+        <p:nvSpPr>
+          <p:cNvPr id="69" name="Text 58"/>
+          <p:cNvSpPr/>
+          <p:nvPr/>
+        </p:nvSpPr>
+        <p:spPr>
+          <a:xfrm>
+            <a:off x="5193792" y="6025896"/>
+            <a:ext cx="2852928" cy="365760"/>
+          </a:xfrm>
+          <a:prstGeom prst="rect">
+            <a:avLst/>
+          </a:prstGeom>
+          <a:noFill/>
+          <a:ln/>
+        </p:spPr>
+        <p:txBody>
+          <a:bodyPr wrap="square" rtlCol="0" anchor="t"/>
+          <a:lstStyle/>
+          <a:p>
+            <a:pPr indent="0" marL="0">
+              <a:buNone/>
+            </a:pPr>
+            <a:r>
+              <a:rPr lang="en-US" sz="900" dirty="0">
+                <a:solidFill>
+                  <a:srgbClr val="545659"/>
+                </a:solidFill>
+                <a:latin typeface="Inter" pitchFamily="34" charset="0"/>
+                <a:ea typeface="Inter" pitchFamily="34" charset="-122"/>
+                <a:cs typeface="Inter" pitchFamily="34" charset="-120"/>
+              </a:rPr>
+              <a:t>metrics · logs · APM  (datadog exporter)</a:t>
+            </a:r>
+            <a:endParaRPr lang="en-US" sz="900" dirty="0"/>
+          </a:p>
+        </p:txBody>
+      </p:sp>
+      <p:sp>
+        <p:nvSpPr>
+          <p:cNvPr id="70" name="Shape 59"/>
+          <p:cNvSpPr/>
+          <p:nvPr/>
+        </p:nvSpPr>
+        <p:spPr>
+          <a:xfrm>
+            <a:off x="8321040" y="5623560"/>
+            <a:ext cx="3246120" cy="841248"/>
+          </a:xfrm>
+          <a:prstGeom prst="roundRect">
+            <a:avLst>
+              <a:gd name="adj" fmla="val 7609"/>
+            </a:avLst>
+          </a:prstGeom>
+          <a:solidFill>
+            <a:srgbClr val="FFFFFF"/>
+          </a:solidFill>
+          <a:ln w="15875">
             <a:solidFill>
               <a:srgbClr val="19416C"/>
             </a:solidFill>
             <a:prstDash val="solid"/>
-            <a:tailEnd type="triangle"/>
           </a:ln>
         </p:spPr>
       </p:sp>
       <p:sp>
         <p:nvSpPr>
-          <p:cNvPr id="63" name="Shape 51"/>
-          <p:cNvSpPr/>
-          <p:nvPr/>
-        </p:nvSpPr>
-        <p:spPr>
-          <a:xfrm>
-            <a:off x="10122408" y="3771900"/>
-            <a:ext cx="0" cy="731520"/>
+          <p:cNvPr id="71" name="Shape 60"/>
+          <p:cNvSpPr/>
+          <p:nvPr/>
+        </p:nvSpPr>
+        <p:spPr>
+          <a:xfrm>
+            <a:off x="8321040" y="5623560"/>
+            <a:ext cx="91440" cy="841248"/>
+          </a:xfrm>
+          <a:prstGeom prst="roundRect">
+            <a:avLst>
+              <a:gd name="adj" fmla="val 70000"/>
+            </a:avLst>
+          </a:prstGeom>
+          <a:solidFill>
+            <a:srgbClr val="19416C"/>
+          </a:solidFill>
+          <a:ln/>
+        </p:spPr>
+      </p:sp>
+      <p:sp>
+        <p:nvSpPr>
+          <p:cNvPr id="72" name="Text 61"/>
+          <p:cNvSpPr/>
+          <p:nvPr/>
+        </p:nvSpPr>
+        <p:spPr>
+          <a:xfrm>
+            <a:off x="8577072" y="5733288"/>
+            <a:ext cx="2898648" cy="292608"/>
+          </a:xfrm>
+          <a:prstGeom prst="rect">
+            <a:avLst/>
+          </a:prstGeom>
+          <a:noFill/>
+          <a:ln/>
+        </p:spPr>
+        <p:txBody>
+          <a:bodyPr wrap="square" rtlCol="0" anchor="ctr"/>
+          <a:lstStyle/>
+          <a:p>
+            <a:pPr indent="0" marL="0">
+              <a:buNone/>
+            </a:pPr>
+            <a:r>
+              <a:rPr lang="en-US" sz="1200" b="1" dirty="0">
+                <a:solidFill>
+                  <a:srgbClr val="2D3543"/>
+                </a:solidFill>
+                <a:latin typeface="Inter" pitchFamily="34" charset="0"/>
+                <a:ea typeface="Inter" pitchFamily="34" charset="-122"/>
+                <a:cs typeface="Inter" pitchFamily="34" charset="-120"/>
+              </a:rPr>
+              <a:t>Splunk</a:t>
+            </a:r>
+            <a:endParaRPr lang="en-US" sz="1200" dirty="0"/>
+          </a:p>
+        </p:txBody>
+      </p:sp>
+      <p:sp>
+        <p:nvSpPr>
+          <p:cNvPr id="73" name="Text 62"/>
+          <p:cNvSpPr/>
+          <p:nvPr/>
+        </p:nvSpPr>
+        <p:spPr>
+          <a:xfrm>
+            <a:off x="8577072" y="6025896"/>
+            <a:ext cx="2898648" cy="365760"/>
+          </a:xfrm>
+          <a:prstGeom prst="rect">
+            <a:avLst/>
+          </a:prstGeom>
+          <a:noFill/>
+          <a:ln/>
+        </p:spPr>
+        <p:txBody>
+          <a:bodyPr wrap="square" rtlCol="0" anchor="t"/>
+          <a:lstStyle/>
+          <a:p>
+            <a:pPr indent="0" marL="0">
+              <a:buNone/>
+            </a:pPr>
+            <a:r>
+              <a:rPr lang="en-US" sz="900" dirty="0">
+                <a:solidFill>
+                  <a:srgbClr val="545659"/>
+                </a:solidFill>
+                <a:latin typeface="Inter" pitchFamily="34" charset="0"/>
+                <a:ea typeface="Inter" pitchFamily="34" charset="-122"/>
+                <a:cs typeface="Inter" pitchFamily="34" charset="-120"/>
+              </a:rPr>
+              <a:t>HEC / Observability Cloud  (splunk_hec)</a:t>
+            </a:r>
+            <a:endParaRPr lang="en-US" sz="900" dirty="0"/>
+          </a:p>
+        </p:txBody>
+      </p:sp>
+      <p:sp>
+        <p:nvSpPr>
+          <p:cNvPr id="74" name="Shape 63"/>
+          <p:cNvSpPr/>
+          <p:nvPr/>
+        </p:nvSpPr>
+        <p:spPr>
+          <a:xfrm>
+            <a:off x="4434840" y="6044184"/>
+            <a:ext cx="502920" cy="0"/>
           </a:xfrm>
           <a:prstGeom prst="line">
             <a:avLst/>
@@ -3730,79 +4096,40 @@
           <a:noFill/>
           <a:ln w="22225">
             <a:solidFill>
-              <a:srgbClr val="009845"/>
+              <a:srgbClr val="006580"/>
             </a:solidFill>
             <a:prstDash val="solid"/>
             <a:tailEnd type="triangle"/>
           </a:ln>
         </p:spPr>
       </p:sp>
-      <p:pic>
-        <p:nvPicPr>
-          <p:cNvPr id="64" name="Image 10" descr="deploy/assets/icons/qvd.png">    </p:cNvPr>
-          <p:cNvPicPr>
-            <a:picLocks noChangeAspect="1"/>
-          </p:cNvPicPr>
-          <p:nvPr/>
-        </p:nvPicPr>
-        <p:blipFill>
-          <a:blip r:embed="rId12"/>
-          <a:stretch>
-            <a:fillRect/>
-          </a:stretch>
-        </p:blipFill>
-        <p:spPr>
-          <a:xfrm>
-            <a:off x="457200" y="6016752"/>
-            <a:ext cx="384048" cy="384048"/>
-          </a:xfrm>
-          <a:prstGeom prst="rect">
-            <a:avLst/>
-          </a:prstGeom>
-        </p:spPr>
-      </p:pic>
-      <p:sp>
-        <p:nvSpPr>
-          <p:cNvPr id="65" name="Text 52"/>
-          <p:cNvSpPr/>
-          <p:nvPr/>
-        </p:nvSpPr>
-        <p:spPr>
-          <a:xfrm>
-            <a:off x="914400" y="6035040"/>
-            <a:ext cx="10789920" cy="411480"/>
-          </a:xfrm>
-          <a:prstGeom prst="rect">
-            <a:avLst/>
-          </a:prstGeom>
-          <a:noFill/>
-          <a:ln/>
-        </p:spPr>
-        <p:txBody>
-          <a:bodyPr wrap="square" rtlCol="0" anchor="ctr"/>
-          <a:lstStyle/>
-          <a:p>
-            <a:pPr indent="0" marL="0">
-              <a:buNone/>
-            </a:pPr>
-            <a:r>
-              <a:rPr lang="en-US" sz="1000" i="1" dirty="0">
-                <a:solidFill>
-                  <a:srgbClr val="2D3543"/>
-                </a:solidFill>
-                <a:latin typeface="Inter" pitchFamily="34" charset="0"/>
-                <a:ea typeface="Inter" pitchFamily="34" charset="-122"/>
-                <a:cs typeface="Inter" pitchFamily="34" charset="-120"/>
-              </a:rPr>
-              <a:t>QVD bridge: Prometheus PromQL → long-form (timestamp, metric, labels, value) rows → QVD via pyqvd → Qlik Cloud Data Files API → analyst sheets.</a:t>
-            </a:r>
-            <a:endParaRPr lang="en-US" sz="1000" dirty="0"/>
-          </a:p>
-        </p:txBody>
-      </p:sp>
-      <p:sp>
-        <p:nvSpPr>
-          <p:cNvPr id="66" name="Shape 53"/>
+      <p:sp>
+        <p:nvSpPr>
+          <p:cNvPr id="75" name="Shape 64"/>
+          <p:cNvSpPr/>
+          <p:nvPr/>
+        </p:nvSpPr>
+        <p:spPr>
+          <a:xfrm>
+            <a:off x="8138160" y="6044184"/>
+            <a:ext cx="182880" cy="0"/>
+          </a:xfrm>
+          <a:prstGeom prst="line">
+            <a:avLst/>
+          </a:prstGeom>
+          <a:noFill/>
+          <a:ln w="22225">
+            <a:solidFill>
+              <a:srgbClr val="006580"/>
+            </a:solidFill>
+            <a:prstDash val="solid"/>
+            <a:tailEnd type="triangle"/>
+          </a:ln>
+        </p:spPr>
+      </p:sp>
+      <p:sp>
+        <p:nvSpPr>
+          <p:cNvPr id="76" name="Shape 65"/>
           <p:cNvSpPr/>
           <p:nvPr/>
         </p:nvSpPr>
@@ -3860,8 +4187,8 @@
         </p:nvSpPr>
         <p:spPr>
           <a:xfrm>
-            <a:off x="457200" y="228600"/>
-            <a:ext cx="11247120" cy="548640"/>
+            <a:off x="1874520" y="292608"/>
+            <a:ext cx="9509760" cy="548640"/>
           </a:xfrm>
           <a:prstGeom prst="rect">
             <a:avLst/>
@@ -3879,7 +4206,7 @@
             <a:r>
               <a:rPr lang="en-US" sz="2600" b="1" dirty="0">
                 <a:solidFill>
-                  <a:srgbClr val="006580"/>
+                  <a:srgbClr val="2D3543"/>
                 </a:solidFill>
                 <a:latin typeface="Inter" pitchFamily="34" charset="0"/>
                 <a:ea typeface="Inter" pitchFamily="34" charset="-122"/>
@@ -5512,8 +5839,8 @@
         </p:nvSpPr>
         <p:spPr>
           <a:xfrm>
-            <a:off x="457200" y="228600"/>
-            <a:ext cx="11247120" cy="548640"/>
+            <a:off x="1874520" y="292608"/>
+            <a:ext cx="9509760" cy="548640"/>
           </a:xfrm>
           <a:prstGeom prst="rect">
             <a:avLst/>
@@ -5531,7 +5858,7 @@
             <a:r>
               <a:rPr lang="en-US" sz="2400" b="1" dirty="0">
                 <a:solidFill>
-                  <a:srgbClr val="006580"/>
+                  <a:srgbClr val="2D3543"/>
                 </a:solidFill>
                 <a:latin typeface="Inter" pitchFamily="34" charset="0"/>
                 <a:ea typeface="Inter" pitchFamily="34" charset="-122"/>
@@ -6567,7 +6894,7 @@
     <p:bg>
       <p:bgPr>
         <a:solidFill>
-          <a:srgbClr val="006580"/>
+          <a:srgbClr val="F6F7F8"/>
         </a:solidFill>
       </p:bgPr>
     </p:bg>
@@ -6593,8 +6920,8 @@
         </p:nvSpPr>
         <p:spPr>
           <a:xfrm>
-            <a:off x="457200" y="365760"/>
-            <a:ext cx="11247120" cy="640080"/>
+            <a:off x="1874520" y="365760"/>
+            <a:ext cx="9509760" cy="640080"/>
           </a:xfrm>
           <a:prstGeom prst="rect">
             <a:avLst/>
@@ -6612,7 +6939,7 @@
             <a:r>
               <a:rPr lang="en-US" sz="3000" b="1" dirty="0">
                 <a:solidFill>
-                  <a:srgbClr val="FFFFFF"/>
+                  <a:srgbClr val="2D3543"/>
                 </a:solidFill>
                 <a:latin typeface="Inter" pitchFamily="34" charset="0"/>
                 <a:ea typeface="Inter" pitchFamily="34" charset="-122"/>
@@ -6632,8 +6959,8 @@
         </p:nvSpPr>
         <p:spPr>
           <a:xfrm>
-            <a:off x="457200" y="1051560"/>
-            <a:ext cx="11247120" cy="365760"/>
+            <a:off x="1874520" y="896112"/>
+            <a:ext cx="9509760" cy="365760"/>
           </a:xfrm>
           <a:prstGeom prst="rect">
             <a:avLst/>
@@ -6651,7 +6978,7 @@
             <a:r>
               <a:rPr lang="en-US" sz="1300" dirty="0">
                 <a:solidFill>
-                  <a:srgbClr val="10CFC9"/>
+                  <a:srgbClr val="545659"/>
                 </a:solidFill>
                 <a:latin typeface="Inter" pitchFamily="34" charset="0"/>
                 <a:ea typeface="Inter" pitchFamily="34" charset="-122"/>
@@ -6760,7 +7087,7 @@
             <a:r>
               <a:rPr lang="en-US" sz="1100" b="1" dirty="0">
                 <a:solidFill>
-                  <a:srgbClr val="10CFC9"/>
+                  <a:srgbClr val="009845"/>
                 </a:solidFill>
                 <a:latin typeface="Inter" pitchFamily="34" charset="0"/>
                 <a:ea typeface="Inter" pitchFamily="34" charset="-122"/>
@@ -6799,7 +7126,7 @@
             <a:r>
               <a:rPr lang="en-US" sz="1000" dirty="0">
                 <a:solidFill>
-                  <a:srgbClr val="FFFFFF"/>
+                  <a:srgbClr val="545659"/>
                 </a:solidFill>
                 <a:latin typeface="Inter" pitchFamily="34" charset="0"/>
                 <a:ea typeface="Inter" pitchFamily="34" charset="-122"/>
@@ -6838,7 +7165,7 @@
             <a:r>
               <a:rPr lang="en-US" sz="1100" b="1" dirty="0">
                 <a:solidFill>
-                  <a:srgbClr val="10CFC9"/>
+                  <a:srgbClr val="009845"/>
                 </a:solidFill>
                 <a:latin typeface="Inter" pitchFamily="34" charset="0"/>
                 <a:ea typeface="Inter" pitchFamily="34" charset="-122"/>
@@ -6877,7 +7204,7 @@
             <a:r>
               <a:rPr lang="en-US" sz="1000" dirty="0">
                 <a:solidFill>
-                  <a:srgbClr val="FFFFFF"/>
+                  <a:srgbClr val="545659"/>
                 </a:solidFill>
                 <a:latin typeface="Inter" pitchFamily="34" charset="0"/>
                 <a:ea typeface="Inter" pitchFamily="34" charset="-122"/>
@@ -6916,7 +7243,7 @@
             <a:r>
               <a:rPr lang="en-US" sz="1100" b="1" dirty="0">
                 <a:solidFill>
-                  <a:srgbClr val="10CFC9"/>
+                  <a:srgbClr val="009845"/>
                 </a:solidFill>
                 <a:latin typeface="Inter" pitchFamily="34" charset="0"/>
                 <a:ea typeface="Inter" pitchFamily="34" charset="-122"/>
@@ -6955,7 +7282,7 @@
             <a:r>
               <a:rPr lang="en-US" sz="1000" dirty="0">
                 <a:solidFill>
-                  <a:srgbClr val="FFFFFF"/>
+                  <a:srgbClr val="545659"/>
                 </a:solidFill>
                 <a:latin typeface="Inter" pitchFamily="34" charset="0"/>
                 <a:ea typeface="Inter" pitchFamily="34" charset="-122"/>
@@ -6994,7 +7321,7 @@
             <a:r>
               <a:rPr lang="en-US" sz="1100" b="1" dirty="0">
                 <a:solidFill>
-                  <a:srgbClr val="10CFC9"/>
+                  <a:srgbClr val="009845"/>
                 </a:solidFill>
                 <a:latin typeface="Inter" pitchFamily="34" charset="0"/>
                 <a:ea typeface="Inter" pitchFamily="34" charset="-122"/>
@@ -7033,7 +7360,7 @@
             <a:r>
               <a:rPr lang="en-US" sz="1000" dirty="0">
                 <a:solidFill>
-                  <a:srgbClr val="FFFFFF"/>
+                  <a:srgbClr val="545659"/>
                 </a:solidFill>
                 <a:latin typeface="Inter" pitchFamily="34" charset="0"/>
                 <a:ea typeface="Inter" pitchFamily="34" charset="-122"/>
@@ -7072,7 +7399,7 @@
             <a:r>
               <a:rPr lang="en-US" sz="1100" b="1" dirty="0">
                 <a:solidFill>
-                  <a:srgbClr val="10CFC9"/>
+                  <a:srgbClr val="009845"/>
                 </a:solidFill>
                 <a:latin typeface="Inter" pitchFamily="34" charset="0"/>
                 <a:ea typeface="Inter" pitchFamily="34" charset="-122"/>
@@ -7111,7 +7438,7 @@
             <a:r>
               <a:rPr lang="en-US" sz="1000" dirty="0">
                 <a:solidFill>
-                  <a:srgbClr val="FFFFFF"/>
+                  <a:srgbClr val="545659"/>
                 </a:solidFill>
                 <a:latin typeface="Inter" pitchFamily="34" charset="0"/>
                 <a:ea typeface="Inter" pitchFamily="34" charset="-122"/>
@@ -7150,7 +7477,7 @@
             <a:r>
               <a:rPr lang="en-US" sz="1100" b="1" dirty="0">
                 <a:solidFill>
-                  <a:srgbClr val="10CFC9"/>
+                  <a:srgbClr val="009845"/>
                 </a:solidFill>
                 <a:latin typeface="Inter" pitchFamily="34" charset="0"/>
                 <a:ea typeface="Inter" pitchFamily="34" charset="-122"/>
@@ -7189,7 +7516,7 @@
             <a:r>
               <a:rPr lang="en-US" sz="1000" dirty="0">
                 <a:solidFill>
-                  <a:srgbClr val="FFFFFF"/>
+                  <a:srgbClr val="545659"/>
                 </a:solidFill>
                 <a:latin typeface="Inter" pitchFamily="34" charset="0"/>
                 <a:ea typeface="Inter" pitchFamily="34" charset="-122"/>
@@ -7228,7 +7555,7 @@
             <a:r>
               <a:rPr lang="en-US" sz="1100" b="1" dirty="0">
                 <a:solidFill>
-                  <a:srgbClr val="10CFC9"/>
+                  <a:srgbClr val="009845"/>
                 </a:solidFill>
                 <a:latin typeface="Inter" pitchFamily="34" charset="0"/>
                 <a:ea typeface="Inter" pitchFamily="34" charset="-122"/>
@@ -7267,7 +7594,7 @@
             <a:r>
               <a:rPr lang="en-US" sz="1000" dirty="0">
                 <a:solidFill>
-                  <a:srgbClr val="FFFFFF"/>
+                  <a:srgbClr val="545659"/>
                 </a:solidFill>
                 <a:latin typeface="Inter" pitchFamily="34" charset="0"/>
                 <a:ea typeface="Inter" pitchFamily="34" charset="-122"/>
@@ -7306,7 +7633,7 @@
             <a:r>
               <a:rPr lang="en-US" sz="1100" b="1" dirty="0">
                 <a:solidFill>
-                  <a:srgbClr val="10CFC9"/>
+                  <a:srgbClr val="009845"/>
                 </a:solidFill>
                 <a:latin typeface="Inter" pitchFamily="34" charset="0"/>
                 <a:ea typeface="Inter" pitchFamily="34" charset="-122"/>
@@ -7345,7 +7672,7 @@
             <a:r>
               <a:rPr lang="en-US" sz="1000" dirty="0">
                 <a:solidFill>
-                  <a:srgbClr val="FFFFFF"/>
+                  <a:srgbClr val="545659"/>
                 </a:solidFill>
                 <a:latin typeface="Inter" pitchFamily="34" charset="0"/>
                 <a:ea typeface="Inter" pitchFamily="34" charset="-122"/>
@@ -7384,7 +7711,7 @@
             <a:r>
               <a:rPr lang="en-US" sz="1100" b="1" dirty="0">
                 <a:solidFill>
-                  <a:srgbClr val="10CFC9"/>
+                  <a:srgbClr val="009845"/>
                 </a:solidFill>
                 <a:latin typeface="Inter" pitchFamily="34" charset="0"/>
                 <a:ea typeface="Inter" pitchFamily="34" charset="-122"/>
@@ -7423,7 +7750,7 @@
             <a:r>
               <a:rPr lang="en-US" sz="1000" dirty="0">
                 <a:solidFill>
-                  <a:srgbClr val="FFFFFF"/>
+                  <a:srgbClr val="545659"/>
                 </a:solidFill>
                 <a:latin typeface="Inter" pitchFamily="34" charset="0"/>
                 <a:ea typeface="Inter" pitchFamily="34" charset="-122"/>
@@ -7462,7 +7789,7 @@
             <a:r>
               <a:rPr lang="en-US" sz="1100" b="1" dirty="0">
                 <a:solidFill>
-                  <a:srgbClr val="10CFC9"/>
+                  <a:srgbClr val="009845"/>
                 </a:solidFill>
                 <a:latin typeface="Inter" pitchFamily="34" charset="0"/>
                 <a:ea typeface="Inter" pitchFamily="34" charset="-122"/>
@@ -7501,7 +7828,7 @@
             <a:r>
               <a:rPr lang="en-US" sz="1000" dirty="0">
                 <a:solidFill>
-                  <a:srgbClr val="FFFFFF"/>
+                  <a:srgbClr val="545659"/>
                 </a:solidFill>
                 <a:latin typeface="Inter" pitchFamily="34" charset="0"/>
                 <a:ea typeface="Inter" pitchFamily="34" charset="-122"/>
@@ -7540,7 +7867,7 @@
             <a:r>
               <a:rPr lang="en-US" sz="1100" b="1" dirty="0">
                 <a:solidFill>
-                  <a:srgbClr val="10CFC9"/>
+                  <a:srgbClr val="009845"/>
                 </a:solidFill>
                 <a:latin typeface="Inter" pitchFamily="34" charset="0"/>
                 <a:ea typeface="Inter" pitchFamily="34" charset="-122"/>
@@ -7579,7 +7906,7 @@
             <a:r>
               <a:rPr lang="en-US" sz="1000" dirty="0">
                 <a:solidFill>
-                  <a:srgbClr val="FFFFFF"/>
+                  <a:srgbClr val="545659"/>
                 </a:solidFill>
                 <a:latin typeface="Inter" pitchFamily="34" charset="0"/>
                 <a:ea typeface="Inter" pitchFamily="34" charset="-122"/>
@@ -7618,7 +7945,7 @@
             <a:r>
               <a:rPr lang="en-US" sz="1100" b="1" dirty="0">
                 <a:solidFill>
-                  <a:srgbClr val="10CFC9"/>
+                  <a:srgbClr val="009845"/>
                 </a:solidFill>
                 <a:latin typeface="Inter" pitchFamily="34" charset="0"/>
                 <a:ea typeface="Inter" pitchFamily="34" charset="-122"/>
@@ -7657,7 +7984,7 @@
             <a:r>
               <a:rPr lang="en-US" sz="1000" dirty="0">
                 <a:solidFill>
-                  <a:srgbClr val="FFFFFF"/>
+                  <a:srgbClr val="545659"/>
                 </a:solidFill>
                 <a:latin typeface="Inter" pitchFamily="34" charset="0"/>
                 <a:ea typeface="Inter" pitchFamily="34" charset="-122"/>

--- a/Qlik-Observability-Toolkit-Architecture.pptx
+++ b/Qlik-Observability-Toolkit-Architecture.pptx
@@ -1362,7 +1362,7 @@
                 <a:ea typeface="Inter" pitchFamily="34" charset="-122"/>
                 <a:cs typeface="Inter" pitchFamily="34" charset="-120"/>
               </a:rPr>
-              <a:t>MCP server · Prometheus · Loki · Grafana · Python exporters · OpenTelemetry · Qlik Sense</a:t>
+              <a:t>MCP server · Prometheus · Loki · Grafana · Python exporters · OpenTelemetry · Qlik Cloud Analytics</a:t>
             </a:r>
             <a:endParaRPr lang="en-US" sz="1600" dirty="0"/>
           </a:p>
@@ -3470,7 +3470,7 @@
                 <a:ea typeface="Inter" pitchFamily="34" charset="-122"/>
                 <a:cs typeface="Inter" pitchFamily="34" charset="-120"/>
               </a:rPr>
-              <a:t>Qlik Sense Cloud app</a:t>
+              <a:t>Qlik Cloud Analytics app</a:t>
             </a:r>
             <a:endParaRPr lang="en-US" sz="1200" dirty="0"/>
           </a:p>
